--- a/slides/นำเสนอระบบแนะนำมือถือ_007.pptx
+++ b/slides/นำเสนอระบบแนะนำมือถือ_007.pptx
@@ -3916,7 +3916,7 @@
                 </a:solidFill>
                 <a:latin typeface="Leelawadee UI"/>
               </a:rPr>
-              <a:t>สาธิตการใช้งาน: เว็บแอป Streamlit 5 หน้า · ข้อมูลบน Neo4j · โค้ด/สไลด์/โน๊ตบุ๊กอยู่บน GitHub</a:t>
+              <a:t>สาธิตการใช้งาน: เว็บแอป Streamlit 6 หน้า (Dashboard → Admin) · ข้อมูลบน Neo4j · โค้ด/สไลด์/โน๊ตบุ๊กอยู่บน GitHub</a:t>
             </a:r>
           </a:p>
         </p:txBody>
@@ -8017,7 +8017,7 @@
                 </a:solidFill>
                 <a:latin typeface="Leelawadee UI"/>
               </a:rPr>
-              <a:t>เดโมสด: แก้ข้อมูลแล้วคำแนะนำเปลี่ยนทันที</a:t>
+              <a:t>Like &amp; Rate: แก้ข้อมูลแล้วคำแนะนำเปลี่ยนทันที</a:t>
             </a:r>
           </a:p>
         </p:txBody>
@@ -8400,6 +8400,63 @@
                 <a:latin typeface="Leelawadee UI"/>
               </a:rPr>
               <a:t>MERGE (u)-[:LIKES]-&gt;(p)</a:t>
+            </a:r>
+          </a:p>
+          <a:p>
+            <a:pPr algn="l">
+              <a:lnSpc>
+                <a:spcPct val="100000"/>
+              </a:lnSpc>
+              <a:spcAft>
+                <a:spcPts val="100"/>
+              </a:spcAft>
+            </a:pPr>
+            <a:r>
+              <a:rPr sz="1150" b="0">
+                <a:solidFill>
+                  <a:srgbClr val="C9E4FF"/>
+                </a:solidFill>
+                <a:latin typeface="Leelawadee UI"/>
+              </a:rPr>
+              <a:t/>
+            </a:r>
+          </a:p>
+          <a:p>
+            <a:pPr algn="l">
+              <a:lnSpc>
+                <a:spcPct val="100000"/>
+              </a:lnSpc>
+              <a:spcAft>
+                <a:spcPts val="100"/>
+              </a:spcAft>
+            </a:pPr>
+            <a:r>
+              <a:rPr sz="1150" b="0">
+                <a:solidFill>
+                  <a:srgbClr val="C9E4FF"/>
+                </a:solidFill>
+                <a:latin typeface="Leelawadee UI"/>
+              </a:rPr>
+              <a:t>// ให้คะแนนดาวกับรุ่นนั้นด้วย (สัญญาณที่ 5)</a:t>
+            </a:r>
+          </a:p>
+          <a:p>
+            <a:pPr algn="l">
+              <a:lnSpc>
+                <a:spcPct val="100000"/>
+              </a:lnSpc>
+              <a:spcAft>
+                <a:spcPts val="100"/>
+              </a:spcAft>
+            </a:pPr>
+            <a:r>
+              <a:rPr sz="1150" b="0">
+                <a:solidFill>
+                  <a:srgbClr val="C9E4FF"/>
+                </a:solidFill>
+                <a:latin typeface="Leelawadee UI"/>
+              </a:rPr>
+              <a:t>MERGE (u)-[r:RATED]-&gt;(p) SET r.stars = 4.5</a:t>
             </a:r>
           </a:p>
           <a:p>
@@ -9479,7 +9536,7 @@
                 </a:solidFill>
                 <a:latin typeface="Leelawadee UI"/>
               </a:rPr>
-              <a:t>เทียบ Cypher (Neo4j) กับ backend สำรองในหน่วยความจำ ของผู้ใช้ทั้ง 12 คน × 5 การตรวจ — ผลตรงกันครบทุกคน</a:t>
+              <a:t>เทียบ Cypher (Neo4j) กับ backend สำรองในหน่วยความจำ ของผู้ใช้ทั้ง 12 คน × 6 การตรวจ (รวมวิธีถ่วงด้วยคะแนนดาว) — ผลตรงกันครบทุกคน</a:t>
             </a:r>
           </a:p>
         </p:txBody>
@@ -10121,7 +10178,7 @@
                 </a:solidFill>
                 <a:latin typeface="Leelawadee UI"/>
               </a:rPr>
-              <a:t>ทำ contact sheet รวมภาพทั้ง 23 รุ่น ตรวจทีละภาพว่าไม่ผิดรุ่น/ไม่ใช่โลโก้/ไม่ใช่ภาพเปล่า</a:t>
+              <a:t>ตรวจด้วยตา 2 รอบ: รอบแรกพบภาพ iPhone 3 รุ่นมืดเกินไป → หาภาพใหม่จาก Commons แล้วตรวจซ้ำ 23/23 ภาพเป็นตัวเครื่องจริง</a:t>
             </a:r>
           </a:p>
         </p:txBody>
@@ -12469,7 +12526,7 @@
                 </a:solidFill>
                 <a:latin typeface="Leelawadee UI"/>
               </a:rPr>
-              <a:t>ระบบนี้เป็นของเราเองทั้งหมด: ออกแบบข้อมูลเอง (12 คน × 23 รุ่น × 38 ความสนใจ) ออกแบบโครงสร้างกราฟเอง เขียนสูตรให้คะแนน 4 วิธีเอง และแสดงภาพสินค้าจริงในผลการแนะนำ</a:t>
+              <a:t>ระบบนี้เป็นของเราเองทั้งหมด: ออกแบบข้อมูลเอง (12 คน × 23 รุ่น × 38 ความสนใจ) ออกแบบโครงสร้างกราฟเอง เขียนสูตรให้คะแนน 5 วิธีเอง และแสดงภาพสินค้าจริงในผลการแนะนำ (แอปมี 6 หน้า)</a:t>
             </a:r>
           </a:p>
           <a:p>
@@ -13454,7 +13511,7 @@
                 </a:solidFill>
                 <a:latin typeface="Leelawadee UI"/>
               </a:rPr>
-              <a:t>ผลการแนะนำ 4 วิธี + ภาพสินค้า + อธิบายเหตุผลย้อนหลังได้</a:t>
+              <a:t>ผลการแนะนำ 5 วิธี + ภาพสินค้าจริง + อธิบายเหตุผลย้อนหลังได้</a:t>
             </a:r>
           </a:p>
         </p:txBody>
@@ -13584,7 +13641,7 @@
                 </a:solidFill>
                 <a:latin typeface="Leelawadee UI"/>
               </a:rPr>
-              <a:t>สาธิตการใช้งาน (เดโมสด)</a:t>
+              <a:t>สาธิตการใช้งาน (Like &amp; Rate)</a:t>
             </a:r>
           </a:p>
         </p:txBody>
@@ -13626,7 +13683,7 @@
                 </a:solidFill>
                 <a:latin typeface="Leelawadee UI"/>
               </a:rPr>
-              <a:t>เพิ่มความสนใจแล้วคำแนะนำเปลี่ยนทันที ไม่ต้องเทรนใหม่</a:t>
+              <a:t>เพิ่มความสนใจ/ให้ดาว แล้วคำแนะนำเปลี่ยนทันที ไม่ต้องเทรนใหม่</a:t>
             </a:r>
           </a:p>
         </p:txBody>
@@ -16980,7 +17037,7 @@
         <p:spPr>
           <a:xfrm>
             <a:off x="6766560" y="1234440"/>
-            <a:ext cx="4681728" cy="1097280"/>
+            <a:ext cx="4681728" cy="1234440"/>
           </a:xfrm>
           <a:prstGeom prst="rect">
             <a:avLst/>
@@ -17028,6 +17085,25 @@
                 <a:latin typeface="Leelawadee UI"/>
               </a:rPr>
               <a:t>ยี่ห้อ: ASUS, Apple, Google, Honor, OPPO, OnePlus, Samsung, Sony, Xiaomi, realme, vivo</a:t>
+            </a:r>
+          </a:p>
+          <a:p>
+            <a:pPr algn="l">
+              <a:lnSpc>
+                <a:spcPct val="106000"/>
+              </a:lnSpc>
+              <a:spcAft>
+                <a:spcPts val="300"/>
+              </a:spcAft>
+            </a:pPr>
+            <a:r>
+              <a:rPr sz="1050" b="0">
+                <a:solidFill>
+                  <a:srgbClr val="FBBF24"/>
+                </a:solidFill>
+                <a:latin typeface="Leelawadee UI"/>
+              </a:rPr>
+              <a:t>คะแนนดาว (RATED {stars}) 38 เส้น · ดาวเฉลี่ยต่อรุ่นใช้เป็นสัญญาณที่ 5</a:t>
             </a:r>
           </a:p>
         </p:txBody>
@@ -20744,7 +20820,7 @@
                 </a:solidFill>
                 <a:latin typeface="Leelawadee UI"/>
               </a:rPr>
-              <a:t>4 วิธี + วิธีผสม (เลือกได้ในแอป)</a:t>
+              <a:t>5 วิธี (เลือกเทียบกันได้ในแอป)</a:t>
             </a:r>
           </a:p>
         </p:txBody>
@@ -21717,42 +21793,97 @@
       </p:sp>
       <p:sp>
         <p:nvSpPr>
-          <p:cNvPr id="24" name="TextBox 23"/>
-          <p:cNvSpPr txBox="1"/>
-          <p:nvPr/>
-        </p:nvSpPr>
-        <p:spPr>
-          <a:xfrm>
-            <a:off x="749808" y="6263640"/>
-            <a:ext cx="10698480" cy="320040"/>
-          </a:xfrm>
-          <a:prstGeom prst="rect">
-            <a:avLst/>
-          </a:prstGeom>
-          <a:noFill/>
-        </p:spPr>
-        <p:txBody>
-          <a:bodyPr wrap="square" anchor="t">
-            <a:spAutoFit/>
-          </a:bodyPr>
-          <a:lstStyle/>
-          <a:p>
-            <a:pPr algn="l">
-              <a:lnSpc>
-                <a:spcPct val="106000"/>
-              </a:lnSpc>
-              <a:spcAft>
-                <a:spcPts val="400"/>
-              </a:spcAft>
-            </a:pPr>
-            <a:r>
-              <a:rPr sz="1050" b="0">
-                <a:solidFill>
-                  <a:srgbClr val="9FB0CB"/>
-                </a:solidFill>
-                <a:latin typeface="Leelawadee UI"/>
-              </a:rPr>
-              <a:t>ทุกวิธีใช้ข้อมูลชุดเดียวกันและผลถูกตรวจสอบเทียบกันแล้ว (ดูหน้าผลการทดสอบ)</a:t>
+          <p:cNvPr id="24" name="Rounded Rectangle 23"/>
+          <p:cNvSpPr/>
+          <p:nvPr/>
+        </p:nvSpPr>
+        <p:spPr>
+          <a:xfrm>
+            <a:off x="749808" y="5961888"/>
+            <a:ext cx="10698480" cy="676656"/>
+          </a:xfrm>
+          <a:prstGeom prst="roundRect">
+            <a:avLst>
+              <a:gd name="adj" fmla="val 6000"/>
+            </a:avLst>
+          </a:prstGeom>
+          <a:solidFill>
+            <a:srgbClr val="1E2A45"/>
+          </a:solidFill>
+          <a:ln w="12700">
+            <a:solidFill>
+              <a:srgbClr val="2B3A5C"/>
+            </a:solidFill>
+          </a:ln>
+          <a:effectLst/>
+        </p:spPr>
+        <p:style>
+          <a:lnRef idx="1">
+            <a:schemeClr val="accent1"/>
+          </a:lnRef>
+          <a:fillRef idx="3">
+            <a:schemeClr val="accent1"/>
+          </a:fillRef>
+          <a:effectRef idx="2">
+            <a:schemeClr val="accent1"/>
+          </a:effectRef>
+          <a:fontRef idx="minor">
+            <a:schemeClr val="lt1"/>
+          </a:fontRef>
+        </p:style>
+        <p:txBody>
+          <a:bodyPr rtlCol="0" anchor="ctr"/>
+          <a:lstStyle/>
+          <a:p/>
+        </p:txBody>
+      </p:sp>
+      <p:sp>
+        <p:nvSpPr>
+          <p:cNvPr id="25" name="TextBox 24"/>
+          <p:cNvSpPr txBox="1"/>
+          <p:nvPr/>
+        </p:nvSpPr>
+        <p:spPr>
+          <a:xfrm>
+            <a:off x="960120" y="6035040"/>
+            <a:ext cx="10241280" cy="548640"/>
+          </a:xfrm>
+          <a:prstGeom prst="rect">
+            <a:avLst/>
+          </a:prstGeom>
+          <a:noFill/>
+        </p:spPr>
+        <p:txBody>
+          <a:bodyPr wrap="square" anchor="t">
+            <a:spAutoFit/>
+          </a:bodyPr>
+          <a:lstStyle/>
+          <a:p>
+            <a:pPr algn="l">
+              <a:lnSpc>
+                <a:spcPct val="106000"/>
+              </a:lnSpc>
+              <a:spcAft>
+                <a:spcPts val="300"/>
+              </a:spcAft>
+            </a:pPr>
+            <a:r>
+              <a:rPr sz="1150" b="1">
+                <a:solidFill>
+                  <a:srgbClr val="FF8833"/>
+                </a:solidFill>
+                <a:latin typeface="Leelawadee UI"/>
+              </a:rPr>
+              <a:t>5) ถ่วงด้วยคะแนนดาว — </a:t>
+            </a:r>
+            <a:r>
+              <a:rPr sz="1100" b="0">
+                <a:solidFill>
+                  <a:srgbClr val="E9EFFA"/>
+                </a:solidFill>
+                <a:latin typeface="Leelawadee UI"/>
+              </a:rPr>
+              <a:t>คะแนน = Σ ( Jaccard(เรา, เพื่อน) × ดาวที่เพื่อนให้รุ่นนั้น ÷ 5 ) ใช้ความสัมพันธ์ RATED {stars} → คนที่ให้ 5 ดาวมีน้ำหนักมากกว่าคนที่ให้ 2 ดาว (ทุกวิธีถูกตรวจเทียบกันแล้ว — ดูหน้าผลการทดสอบ)</a:t>
             </a:r>
           </a:p>
         </p:txBody>
@@ -21904,7 +22035,7 @@
                 </a:solidFill>
                 <a:latin typeface="Leelawadee UI"/>
               </a:rPr>
-              <a:t>เว็บแอป Streamlit ต่อ Neo4j — หน้าแนะนำมือถือ</a:t>
+              <a:t>เว็บแอป Streamlit ต่อ Neo4j — เมนู 6 หน้า</a:t>
             </a:r>
           </a:p>
         </p:txBody>
@@ -22035,9 +22166,1041 @@
           </a:p>
         </p:txBody>
       </p:sp>
+      <p:sp>
+        <p:nvSpPr>
+          <p:cNvPr id="8" name="Rounded Rectangle 7"/>
+          <p:cNvSpPr/>
+          <p:nvPr/>
+        </p:nvSpPr>
+        <p:spPr>
+          <a:xfrm>
+            <a:off x="749808" y="1188720"/>
+            <a:ext cx="5120640" cy="658368"/>
+          </a:xfrm>
+          <a:prstGeom prst="roundRect">
+            <a:avLst>
+              <a:gd name="adj" fmla="val 6000"/>
+            </a:avLst>
+          </a:prstGeom>
+          <a:solidFill>
+            <a:srgbClr val="172136"/>
+          </a:solidFill>
+          <a:ln w="12700">
+            <a:solidFill>
+              <a:srgbClr val="2B3A5C"/>
+            </a:solidFill>
+          </a:ln>
+          <a:effectLst/>
+        </p:spPr>
+        <p:style>
+          <a:lnRef idx="1">
+            <a:schemeClr val="accent1"/>
+          </a:lnRef>
+          <a:fillRef idx="3">
+            <a:schemeClr val="accent1"/>
+          </a:fillRef>
+          <a:effectRef idx="2">
+            <a:schemeClr val="accent1"/>
+          </a:effectRef>
+          <a:fontRef idx="minor">
+            <a:schemeClr val="lt1"/>
+          </a:fontRef>
+        </p:style>
+        <p:txBody>
+          <a:bodyPr rtlCol="0" anchor="ctr"/>
+          <a:lstStyle/>
+          <a:p/>
+        </p:txBody>
+      </p:sp>
+      <p:sp>
+        <p:nvSpPr>
+          <p:cNvPr id="9" name="Rectangle 8"/>
+          <p:cNvSpPr/>
+          <p:nvPr/>
+        </p:nvSpPr>
+        <p:spPr>
+          <a:xfrm>
+            <a:off x="749808" y="1188720"/>
+            <a:ext cx="50292" cy="658368"/>
+          </a:xfrm>
+          <a:prstGeom prst="rect">
+            <a:avLst/>
+          </a:prstGeom>
+          <a:solidFill>
+            <a:srgbClr val="FF8833"/>
+          </a:solidFill>
+          <a:ln>
+            <a:noFill/>
+          </a:ln>
+          <a:effectLst/>
+        </p:spPr>
+        <p:style>
+          <a:lnRef idx="1">
+            <a:schemeClr val="accent1"/>
+          </a:lnRef>
+          <a:fillRef idx="3">
+            <a:schemeClr val="accent1"/>
+          </a:fillRef>
+          <a:effectRef idx="2">
+            <a:schemeClr val="accent1"/>
+          </a:effectRef>
+          <a:fontRef idx="minor">
+            <a:schemeClr val="lt1"/>
+          </a:fontRef>
+        </p:style>
+        <p:txBody>
+          <a:bodyPr rtlCol="0" anchor="ctr"/>
+          <a:lstStyle/>
+          <a:p/>
+        </p:txBody>
+      </p:sp>
+      <p:sp>
+        <p:nvSpPr>
+          <p:cNvPr id="10" name="TextBox 9"/>
+          <p:cNvSpPr txBox="1"/>
+          <p:nvPr/>
+        </p:nvSpPr>
+        <p:spPr>
+          <a:xfrm>
+            <a:off x="914400" y="1243584"/>
+            <a:ext cx="2286000" cy="274320"/>
+          </a:xfrm>
+          <a:prstGeom prst="rect">
+            <a:avLst/>
+          </a:prstGeom>
+          <a:noFill/>
+        </p:spPr>
+        <p:txBody>
+          <a:bodyPr wrap="square" anchor="t">
+            <a:spAutoFit/>
+          </a:bodyPr>
+          <a:lstStyle/>
+          <a:p>
+            <a:pPr algn="l">
+              <a:lnSpc>
+                <a:spcPct val="106000"/>
+              </a:lnSpc>
+              <a:spcAft>
+                <a:spcPts val="400"/>
+              </a:spcAft>
+            </a:pPr>
+            <a:r>
+              <a:rPr sz="1200" b="1">
+                <a:solidFill>
+                  <a:srgbClr val="E9EFFA"/>
+                </a:solidFill>
+                <a:latin typeface="Leelawadee UI"/>
+              </a:rPr>
+              <a:t>Dashboard</a:t>
+            </a:r>
+          </a:p>
+        </p:txBody>
+      </p:sp>
+      <p:sp>
+        <p:nvSpPr>
+          <p:cNvPr id="11" name="TextBox 10"/>
+          <p:cNvSpPr txBox="1"/>
+          <p:nvPr/>
+        </p:nvSpPr>
+        <p:spPr>
+          <a:xfrm>
+            <a:off x="914400" y="1517904"/>
+            <a:ext cx="4800600" cy="274320"/>
+          </a:xfrm>
+          <a:prstGeom prst="rect">
+            <a:avLst/>
+          </a:prstGeom>
+          <a:noFill/>
+        </p:spPr>
+        <p:txBody>
+          <a:bodyPr wrap="square" anchor="t">
+            <a:spAutoFit/>
+          </a:bodyPr>
+          <a:lstStyle/>
+          <a:p>
+            <a:pPr algn="l">
+              <a:lnSpc>
+                <a:spcPct val="106000"/>
+              </a:lnSpc>
+              <a:spcAft>
+                <a:spcPts val="400"/>
+              </a:spcAft>
+            </a:pPr>
+            <a:r>
+              <a:rPr sz="1000" b="0">
+                <a:solidFill>
+                  <a:srgbClr val="9FB0CB"/>
+                </a:solidFill>
+                <a:latin typeface="Leelawadee UI"/>
+              </a:rPr>
+              <a:t>ภาพรวมระบบ 6 ตัวชี้วัด + กราฟ + โปรไฟล์ผู้ใช้</a:t>
+            </a:r>
+          </a:p>
+        </p:txBody>
+      </p:sp>
+      <p:sp>
+        <p:nvSpPr>
+          <p:cNvPr id="12" name="Rounded Rectangle 11"/>
+          <p:cNvSpPr/>
+          <p:nvPr/>
+        </p:nvSpPr>
+        <p:spPr>
+          <a:xfrm>
+            <a:off x="749808" y="1911095"/>
+            <a:ext cx="5120640" cy="658368"/>
+          </a:xfrm>
+          <a:prstGeom prst="roundRect">
+            <a:avLst>
+              <a:gd name="adj" fmla="val 6000"/>
+            </a:avLst>
+          </a:prstGeom>
+          <a:solidFill>
+            <a:srgbClr val="172136"/>
+          </a:solidFill>
+          <a:ln w="12700">
+            <a:solidFill>
+              <a:srgbClr val="2B3A5C"/>
+            </a:solidFill>
+          </a:ln>
+          <a:effectLst/>
+        </p:spPr>
+        <p:style>
+          <a:lnRef idx="1">
+            <a:schemeClr val="accent1"/>
+          </a:lnRef>
+          <a:fillRef idx="3">
+            <a:schemeClr val="accent1"/>
+          </a:fillRef>
+          <a:effectRef idx="2">
+            <a:schemeClr val="accent1"/>
+          </a:effectRef>
+          <a:fontRef idx="minor">
+            <a:schemeClr val="lt1"/>
+          </a:fontRef>
+        </p:style>
+        <p:txBody>
+          <a:bodyPr rtlCol="0" anchor="ctr"/>
+          <a:lstStyle/>
+          <a:p/>
+        </p:txBody>
+      </p:sp>
+      <p:sp>
+        <p:nvSpPr>
+          <p:cNvPr id="13" name="Rectangle 12"/>
+          <p:cNvSpPr/>
+          <p:nvPr/>
+        </p:nvSpPr>
+        <p:spPr>
+          <a:xfrm>
+            <a:off x="749808" y="1911095"/>
+            <a:ext cx="50292" cy="658368"/>
+          </a:xfrm>
+          <a:prstGeom prst="rect">
+            <a:avLst/>
+          </a:prstGeom>
+          <a:solidFill>
+            <a:srgbClr val="34D399"/>
+          </a:solidFill>
+          <a:ln>
+            <a:noFill/>
+          </a:ln>
+          <a:effectLst/>
+        </p:spPr>
+        <p:style>
+          <a:lnRef idx="1">
+            <a:schemeClr val="accent1"/>
+          </a:lnRef>
+          <a:fillRef idx="3">
+            <a:schemeClr val="accent1"/>
+          </a:fillRef>
+          <a:effectRef idx="2">
+            <a:schemeClr val="accent1"/>
+          </a:effectRef>
+          <a:fontRef idx="minor">
+            <a:schemeClr val="lt1"/>
+          </a:fontRef>
+        </p:style>
+        <p:txBody>
+          <a:bodyPr rtlCol="0" anchor="ctr"/>
+          <a:lstStyle/>
+          <a:p/>
+        </p:txBody>
+      </p:sp>
+      <p:sp>
+        <p:nvSpPr>
+          <p:cNvPr id="14" name="TextBox 13"/>
+          <p:cNvSpPr txBox="1"/>
+          <p:nvPr/>
+        </p:nvSpPr>
+        <p:spPr>
+          <a:xfrm>
+            <a:off x="914400" y="1965960"/>
+            <a:ext cx="2286000" cy="274320"/>
+          </a:xfrm>
+          <a:prstGeom prst="rect">
+            <a:avLst/>
+          </a:prstGeom>
+          <a:noFill/>
+        </p:spPr>
+        <p:txBody>
+          <a:bodyPr wrap="square" anchor="t">
+            <a:spAutoFit/>
+          </a:bodyPr>
+          <a:lstStyle/>
+          <a:p>
+            <a:pPr algn="l">
+              <a:lnSpc>
+                <a:spcPct val="106000"/>
+              </a:lnSpc>
+              <a:spcAft>
+                <a:spcPts val="400"/>
+              </a:spcAft>
+            </a:pPr>
+            <a:r>
+              <a:rPr sz="1200" b="1">
+                <a:solidFill>
+                  <a:srgbClr val="E9EFFA"/>
+                </a:solidFill>
+                <a:latin typeface="Leelawadee UI"/>
+              </a:rPr>
+              <a:t>Recommendations</a:t>
+            </a:r>
+          </a:p>
+        </p:txBody>
+      </p:sp>
+      <p:sp>
+        <p:nvSpPr>
+          <p:cNvPr id="15" name="TextBox 14"/>
+          <p:cNvSpPr txBox="1"/>
+          <p:nvPr/>
+        </p:nvSpPr>
+        <p:spPr>
+          <a:xfrm>
+            <a:off x="914400" y="2240279"/>
+            <a:ext cx="4800600" cy="274320"/>
+          </a:xfrm>
+          <a:prstGeom prst="rect">
+            <a:avLst/>
+          </a:prstGeom>
+          <a:noFill/>
+        </p:spPr>
+        <p:txBody>
+          <a:bodyPr wrap="square" anchor="t">
+            <a:spAutoFit/>
+          </a:bodyPr>
+          <a:lstStyle/>
+          <a:p>
+            <a:pPr algn="l">
+              <a:lnSpc>
+                <a:spcPct val="106000"/>
+              </a:lnSpc>
+              <a:spcAft>
+                <a:spcPts val="400"/>
+              </a:spcAft>
+            </a:pPr>
+            <a:r>
+              <a:rPr sz="1000" b="0">
+                <a:solidFill>
+                  <a:srgbClr val="9FB0CB"/>
+                </a:solidFill>
+                <a:latin typeface="Leelawadee UI"/>
+              </a:rPr>
+              <a:t>การ์ดคำแนะนำมีภาพสินค้า + คะแนน + เหตุผล (5 วิธี)</a:t>
+            </a:r>
+          </a:p>
+        </p:txBody>
+      </p:sp>
+      <p:sp>
+        <p:nvSpPr>
+          <p:cNvPr id="16" name="Rounded Rectangle 15"/>
+          <p:cNvSpPr/>
+          <p:nvPr/>
+        </p:nvSpPr>
+        <p:spPr>
+          <a:xfrm>
+            <a:off x="749808" y="2633472"/>
+            <a:ext cx="5120640" cy="658368"/>
+          </a:xfrm>
+          <a:prstGeom prst="roundRect">
+            <a:avLst>
+              <a:gd name="adj" fmla="val 6000"/>
+            </a:avLst>
+          </a:prstGeom>
+          <a:solidFill>
+            <a:srgbClr val="172136"/>
+          </a:solidFill>
+          <a:ln w="12700">
+            <a:solidFill>
+              <a:srgbClr val="2B3A5C"/>
+            </a:solidFill>
+          </a:ln>
+          <a:effectLst/>
+        </p:spPr>
+        <p:style>
+          <a:lnRef idx="1">
+            <a:schemeClr val="accent1"/>
+          </a:lnRef>
+          <a:fillRef idx="3">
+            <a:schemeClr val="accent1"/>
+          </a:fillRef>
+          <a:effectRef idx="2">
+            <a:schemeClr val="accent1"/>
+          </a:effectRef>
+          <a:fontRef idx="minor">
+            <a:schemeClr val="lt1"/>
+          </a:fontRef>
+        </p:style>
+        <p:txBody>
+          <a:bodyPr rtlCol="0" anchor="ctr"/>
+          <a:lstStyle/>
+          <a:p/>
+        </p:txBody>
+      </p:sp>
+      <p:sp>
+        <p:nvSpPr>
+          <p:cNvPr id="17" name="Rectangle 16"/>
+          <p:cNvSpPr/>
+          <p:nvPr/>
+        </p:nvSpPr>
+        <p:spPr>
+          <a:xfrm>
+            <a:off x="749808" y="2633472"/>
+            <a:ext cx="50292" cy="658368"/>
+          </a:xfrm>
+          <a:prstGeom prst="rect">
+            <a:avLst/>
+          </a:prstGeom>
+          <a:solidFill>
+            <a:srgbClr val="38BDF8"/>
+          </a:solidFill>
+          <a:ln>
+            <a:noFill/>
+          </a:ln>
+          <a:effectLst/>
+        </p:spPr>
+        <p:style>
+          <a:lnRef idx="1">
+            <a:schemeClr val="accent1"/>
+          </a:lnRef>
+          <a:fillRef idx="3">
+            <a:schemeClr val="accent1"/>
+          </a:fillRef>
+          <a:effectRef idx="2">
+            <a:schemeClr val="accent1"/>
+          </a:effectRef>
+          <a:fontRef idx="minor">
+            <a:schemeClr val="lt1"/>
+          </a:fontRef>
+        </p:style>
+        <p:txBody>
+          <a:bodyPr rtlCol="0" anchor="ctr"/>
+          <a:lstStyle/>
+          <a:p/>
+        </p:txBody>
+      </p:sp>
+      <p:sp>
+        <p:nvSpPr>
+          <p:cNvPr id="18" name="TextBox 17"/>
+          <p:cNvSpPr txBox="1"/>
+          <p:nvPr/>
+        </p:nvSpPr>
+        <p:spPr>
+          <a:xfrm>
+            <a:off x="914400" y="2688336"/>
+            <a:ext cx="2286000" cy="274320"/>
+          </a:xfrm>
+          <a:prstGeom prst="rect">
+            <a:avLst/>
+          </a:prstGeom>
+          <a:noFill/>
+        </p:spPr>
+        <p:txBody>
+          <a:bodyPr wrap="square" anchor="t">
+            <a:spAutoFit/>
+          </a:bodyPr>
+          <a:lstStyle/>
+          <a:p>
+            <a:pPr algn="l">
+              <a:lnSpc>
+                <a:spcPct val="106000"/>
+              </a:lnSpc>
+              <a:spcAft>
+                <a:spcPts val="400"/>
+              </a:spcAft>
+            </a:pPr>
+            <a:r>
+              <a:rPr sz="1200" b="1">
+                <a:solidFill>
+                  <a:srgbClr val="E9EFFA"/>
+                </a:solidFill>
+                <a:latin typeface="Leelawadee UI"/>
+              </a:rPr>
+              <a:t>Phone Search</a:t>
+            </a:r>
+          </a:p>
+        </p:txBody>
+      </p:sp>
+      <p:sp>
+        <p:nvSpPr>
+          <p:cNvPr id="19" name="TextBox 18"/>
+          <p:cNvSpPr txBox="1"/>
+          <p:nvPr/>
+        </p:nvSpPr>
+        <p:spPr>
+          <a:xfrm>
+            <a:off x="914400" y="2962656"/>
+            <a:ext cx="4800600" cy="274320"/>
+          </a:xfrm>
+          <a:prstGeom prst="rect">
+            <a:avLst/>
+          </a:prstGeom>
+          <a:noFill/>
+        </p:spPr>
+        <p:txBody>
+          <a:bodyPr wrap="square" anchor="t">
+            <a:spAutoFit/>
+          </a:bodyPr>
+          <a:lstStyle/>
+          <a:p>
+            <a:pPr algn="l">
+              <a:lnSpc>
+                <a:spcPct val="106000"/>
+              </a:lnSpc>
+              <a:spcAft>
+                <a:spcPts val="400"/>
+              </a:spcAft>
+            </a:pPr>
+            <a:r>
+              <a:rPr sz="1000" b="0">
+                <a:solidFill>
+                  <a:srgbClr val="9FB0CB"/>
+                </a:solidFill>
+                <a:latin typeface="Leelawadee UI"/>
+              </a:rPr>
+              <a:t>ค้นหา/กรอง 23 รุ่น พร้อมภาพสินค้าจริง</a:t>
+            </a:r>
+          </a:p>
+        </p:txBody>
+      </p:sp>
+      <p:sp>
+        <p:nvSpPr>
+          <p:cNvPr id="20" name="Rounded Rectangle 19"/>
+          <p:cNvSpPr/>
+          <p:nvPr/>
+        </p:nvSpPr>
+        <p:spPr>
+          <a:xfrm>
+            <a:off x="749808" y="3355848"/>
+            <a:ext cx="5120640" cy="658368"/>
+          </a:xfrm>
+          <a:prstGeom prst="roundRect">
+            <a:avLst>
+              <a:gd name="adj" fmla="val 6000"/>
+            </a:avLst>
+          </a:prstGeom>
+          <a:solidFill>
+            <a:srgbClr val="172136"/>
+          </a:solidFill>
+          <a:ln w="12700">
+            <a:solidFill>
+              <a:srgbClr val="2B3A5C"/>
+            </a:solidFill>
+          </a:ln>
+          <a:effectLst/>
+        </p:spPr>
+        <p:style>
+          <a:lnRef idx="1">
+            <a:schemeClr val="accent1"/>
+          </a:lnRef>
+          <a:fillRef idx="3">
+            <a:schemeClr val="accent1"/>
+          </a:fillRef>
+          <a:effectRef idx="2">
+            <a:schemeClr val="accent1"/>
+          </a:effectRef>
+          <a:fontRef idx="minor">
+            <a:schemeClr val="lt1"/>
+          </a:fontRef>
+        </p:style>
+        <p:txBody>
+          <a:bodyPr rtlCol="0" anchor="ctr"/>
+          <a:lstStyle/>
+          <a:p/>
+        </p:txBody>
+      </p:sp>
+      <p:sp>
+        <p:nvSpPr>
+          <p:cNvPr id="21" name="Rectangle 20"/>
+          <p:cNvSpPr/>
+          <p:nvPr/>
+        </p:nvSpPr>
+        <p:spPr>
+          <a:xfrm>
+            <a:off x="749808" y="3355848"/>
+            <a:ext cx="50292" cy="658368"/>
+          </a:xfrm>
+          <a:prstGeom prst="rect">
+            <a:avLst/>
+          </a:prstGeom>
+          <a:solidFill>
+            <a:srgbClr val="FBBF24"/>
+          </a:solidFill>
+          <a:ln>
+            <a:noFill/>
+          </a:ln>
+          <a:effectLst/>
+        </p:spPr>
+        <p:style>
+          <a:lnRef idx="1">
+            <a:schemeClr val="accent1"/>
+          </a:lnRef>
+          <a:fillRef idx="3">
+            <a:schemeClr val="accent1"/>
+          </a:fillRef>
+          <a:effectRef idx="2">
+            <a:schemeClr val="accent1"/>
+          </a:effectRef>
+          <a:fontRef idx="minor">
+            <a:schemeClr val="lt1"/>
+          </a:fontRef>
+        </p:style>
+        <p:txBody>
+          <a:bodyPr rtlCol="0" anchor="ctr"/>
+          <a:lstStyle/>
+          <a:p/>
+        </p:txBody>
+      </p:sp>
+      <p:sp>
+        <p:nvSpPr>
+          <p:cNvPr id="22" name="TextBox 21"/>
+          <p:cNvSpPr txBox="1"/>
+          <p:nvPr/>
+        </p:nvSpPr>
+        <p:spPr>
+          <a:xfrm>
+            <a:off x="914400" y="3410712"/>
+            <a:ext cx="2286000" cy="274320"/>
+          </a:xfrm>
+          <a:prstGeom prst="rect">
+            <a:avLst/>
+          </a:prstGeom>
+          <a:noFill/>
+        </p:spPr>
+        <p:txBody>
+          <a:bodyPr wrap="square" anchor="t">
+            <a:spAutoFit/>
+          </a:bodyPr>
+          <a:lstStyle/>
+          <a:p>
+            <a:pPr algn="l">
+              <a:lnSpc>
+                <a:spcPct val="106000"/>
+              </a:lnSpc>
+              <a:spcAft>
+                <a:spcPts val="400"/>
+              </a:spcAft>
+            </a:pPr>
+            <a:r>
+              <a:rPr sz="1200" b="1">
+                <a:solidFill>
+                  <a:srgbClr val="E9EFFA"/>
+                </a:solidFill>
+                <a:latin typeface="Leelawadee UI"/>
+              </a:rPr>
+              <a:t>Like &amp; Rate</a:t>
+            </a:r>
+          </a:p>
+        </p:txBody>
+      </p:sp>
+      <p:sp>
+        <p:nvSpPr>
+          <p:cNvPr id="23" name="TextBox 22"/>
+          <p:cNvSpPr txBox="1"/>
+          <p:nvPr/>
+        </p:nvSpPr>
+        <p:spPr>
+          <a:xfrm>
+            <a:off x="914400" y="3685032"/>
+            <a:ext cx="4800600" cy="274320"/>
+          </a:xfrm>
+          <a:prstGeom prst="rect">
+            <a:avLst/>
+          </a:prstGeom>
+          <a:noFill/>
+        </p:spPr>
+        <p:txBody>
+          <a:bodyPr wrap="square" anchor="t">
+            <a:spAutoFit/>
+          </a:bodyPr>
+          <a:lstStyle/>
+          <a:p>
+            <a:pPr algn="l">
+              <a:lnSpc>
+                <a:spcPct val="106000"/>
+              </a:lnSpc>
+              <a:spcAft>
+                <a:spcPts val="400"/>
+              </a:spcAft>
+            </a:pPr>
+            <a:r>
+              <a:rPr sz="1000" b="0">
+                <a:solidFill>
+                  <a:srgbClr val="9FB0CB"/>
+                </a:solidFill>
+                <a:latin typeface="Leelawadee UI"/>
+              </a:rPr>
+              <a:t>เพิ่ม/ลบความสนใจ + ให้ดาว แล้วเห็นผลก่อน–หลัง</a:t>
+            </a:r>
+          </a:p>
+        </p:txBody>
+      </p:sp>
+      <p:sp>
+        <p:nvSpPr>
+          <p:cNvPr id="24" name="Rounded Rectangle 23"/>
+          <p:cNvSpPr/>
+          <p:nvPr/>
+        </p:nvSpPr>
+        <p:spPr>
+          <a:xfrm>
+            <a:off x="749808" y="4078224"/>
+            <a:ext cx="5120640" cy="658368"/>
+          </a:xfrm>
+          <a:prstGeom prst="roundRect">
+            <a:avLst>
+              <a:gd name="adj" fmla="val 6000"/>
+            </a:avLst>
+          </a:prstGeom>
+          <a:solidFill>
+            <a:srgbClr val="172136"/>
+          </a:solidFill>
+          <a:ln w="12700">
+            <a:solidFill>
+              <a:srgbClr val="2B3A5C"/>
+            </a:solidFill>
+          </a:ln>
+          <a:effectLst/>
+        </p:spPr>
+        <p:style>
+          <a:lnRef idx="1">
+            <a:schemeClr val="accent1"/>
+          </a:lnRef>
+          <a:fillRef idx="3">
+            <a:schemeClr val="accent1"/>
+          </a:fillRef>
+          <a:effectRef idx="2">
+            <a:schemeClr val="accent1"/>
+          </a:effectRef>
+          <a:fontRef idx="minor">
+            <a:schemeClr val="lt1"/>
+          </a:fontRef>
+        </p:style>
+        <p:txBody>
+          <a:bodyPr rtlCol="0" anchor="ctr"/>
+          <a:lstStyle/>
+          <a:p/>
+        </p:txBody>
+      </p:sp>
+      <p:sp>
+        <p:nvSpPr>
+          <p:cNvPr id="25" name="Rectangle 24"/>
+          <p:cNvSpPr/>
+          <p:nvPr/>
+        </p:nvSpPr>
+        <p:spPr>
+          <a:xfrm>
+            <a:off x="749808" y="4078224"/>
+            <a:ext cx="50292" cy="658368"/>
+          </a:xfrm>
+          <a:prstGeom prst="rect">
+            <a:avLst/>
+          </a:prstGeom>
+          <a:solidFill>
+            <a:srgbClr val="FF8833"/>
+          </a:solidFill>
+          <a:ln>
+            <a:noFill/>
+          </a:ln>
+          <a:effectLst/>
+        </p:spPr>
+        <p:style>
+          <a:lnRef idx="1">
+            <a:schemeClr val="accent1"/>
+          </a:lnRef>
+          <a:fillRef idx="3">
+            <a:schemeClr val="accent1"/>
+          </a:fillRef>
+          <a:effectRef idx="2">
+            <a:schemeClr val="accent1"/>
+          </a:effectRef>
+          <a:fontRef idx="minor">
+            <a:schemeClr val="lt1"/>
+          </a:fontRef>
+        </p:style>
+        <p:txBody>
+          <a:bodyPr rtlCol="0" anchor="ctr"/>
+          <a:lstStyle/>
+          <a:p/>
+        </p:txBody>
+      </p:sp>
+      <p:sp>
+        <p:nvSpPr>
+          <p:cNvPr id="26" name="TextBox 25"/>
+          <p:cNvSpPr txBox="1"/>
+          <p:nvPr/>
+        </p:nvSpPr>
+        <p:spPr>
+          <a:xfrm>
+            <a:off x="914400" y="4133087"/>
+            <a:ext cx="2286000" cy="274320"/>
+          </a:xfrm>
+          <a:prstGeom prst="rect">
+            <a:avLst/>
+          </a:prstGeom>
+          <a:noFill/>
+        </p:spPr>
+        <p:txBody>
+          <a:bodyPr wrap="square" anchor="t">
+            <a:spAutoFit/>
+          </a:bodyPr>
+          <a:lstStyle/>
+          <a:p>
+            <a:pPr algn="l">
+              <a:lnSpc>
+                <a:spcPct val="106000"/>
+              </a:lnSpc>
+              <a:spcAft>
+                <a:spcPts val="400"/>
+              </a:spcAft>
+            </a:pPr>
+            <a:r>
+              <a:rPr sz="1200" b="1">
+                <a:solidFill>
+                  <a:srgbClr val="E9EFFA"/>
+                </a:solidFill>
+                <a:latin typeface="Leelawadee UI"/>
+              </a:rPr>
+              <a:t>Graph Explorer</a:t>
+            </a:r>
+          </a:p>
+        </p:txBody>
+      </p:sp>
+      <p:sp>
+        <p:nvSpPr>
+          <p:cNvPr id="27" name="TextBox 26"/>
+          <p:cNvSpPr txBox="1"/>
+          <p:nvPr/>
+        </p:nvSpPr>
+        <p:spPr>
+          <a:xfrm>
+            <a:off x="914400" y="4407408"/>
+            <a:ext cx="4800600" cy="274320"/>
+          </a:xfrm>
+          <a:prstGeom prst="rect">
+            <a:avLst/>
+          </a:prstGeom>
+          <a:noFill/>
+        </p:spPr>
+        <p:txBody>
+          <a:bodyPr wrap="square" anchor="t">
+            <a:spAutoFit/>
+          </a:bodyPr>
+          <a:lstStyle/>
+          <a:p>
+            <a:pPr algn="l">
+              <a:lnSpc>
+                <a:spcPct val="106000"/>
+              </a:lnSpc>
+              <a:spcAft>
+                <a:spcPts val="400"/>
+              </a:spcAft>
+            </a:pPr>
+            <a:r>
+              <a:rPr sz="1000" b="0">
+                <a:solidFill>
+                  <a:srgbClr val="9FB0CB"/>
+                </a:solidFill>
+                <a:latin typeface="Leelawadee UI"/>
+              </a:rPr>
+              <a:t>กราฟความสัมพันธ์ + ตาราง edge + รัน Cypher เอง</a:t>
+            </a:r>
+          </a:p>
+        </p:txBody>
+      </p:sp>
+      <p:sp>
+        <p:nvSpPr>
+          <p:cNvPr id="28" name="Rounded Rectangle 27"/>
+          <p:cNvSpPr/>
+          <p:nvPr/>
+        </p:nvSpPr>
+        <p:spPr>
+          <a:xfrm>
+            <a:off x="749808" y="4800600"/>
+            <a:ext cx="5120640" cy="658368"/>
+          </a:xfrm>
+          <a:prstGeom prst="roundRect">
+            <a:avLst>
+              <a:gd name="adj" fmla="val 6000"/>
+            </a:avLst>
+          </a:prstGeom>
+          <a:solidFill>
+            <a:srgbClr val="172136"/>
+          </a:solidFill>
+          <a:ln w="12700">
+            <a:solidFill>
+              <a:srgbClr val="2B3A5C"/>
+            </a:solidFill>
+          </a:ln>
+          <a:effectLst/>
+        </p:spPr>
+        <p:style>
+          <a:lnRef idx="1">
+            <a:schemeClr val="accent1"/>
+          </a:lnRef>
+          <a:fillRef idx="3">
+            <a:schemeClr val="accent1"/>
+          </a:fillRef>
+          <a:effectRef idx="2">
+            <a:schemeClr val="accent1"/>
+          </a:effectRef>
+          <a:fontRef idx="minor">
+            <a:schemeClr val="lt1"/>
+          </a:fontRef>
+        </p:style>
+        <p:txBody>
+          <a:bodyPr rtlCol="0" anchor="ctr"/>
+          <a:lstStyle/>
+          <a:p/>
+        </p:txBody>
+      </p:sp>
+      <p:sp>
+        <p:nvSpPr>
+          <p:cNvPr id="29" name="Rectangle 28"/>
+          <p:cNvSpPr/>
+          <p:nvPr/>
+        </p:nvSpPr>
+        <p:spPr>
+          <a:xfrm>
+            <a:off x="749808" y="4800600"/>
+            <a:ext cx="50292" cy="658368"/>
+          </a:xfrm>
+          <a:prstGeom prst="rect">
+            <a:avLst/>
+          </a:prstGeom>
+          <a:solidFill>
+            <a:srgbClr val="34D399"/>
+          </a:solidFill>
+          <a:ln>
+            <a:noFill/>
+          </a:ln>
+          <a:effectLst/>
+        </p:spPr>
+        <p:style>
+          <a:lnRef idx="1">
+            <a:schemeClr val="accent1"/>
+          </a:lnRef>
+          <a:fillRef idx="3">
+            <a:schemeClr val="accent1"/>
+          </a:fillRef>
+          <a:effectRef idx="2">
+            <a:schemeClr val="accent1"/>
+          </a:effectRef>
+          <a:fontRef idx="minor">
+            <a:schemeClr val="lt1"/>
+          </a:fontRef>
+        </p:style>
+        <p:txBody>
+          <a:bodyPr rtlCol="0" anchor="ctr"/>
+          <a:lstStyle/>
+          <a:p/>
+        </p:txBody>
+      </p:sp>
+      <p:sp>
+        <p:nvSpPr>
+          <p:cNvPr id="30" name="TextBox 29"/>
+          <p:cNvSpPr txBox="1"/>
+          <p:nvPr/>
+        </p:nvSpPr>
+        <p:spPr>
+          <a:xfrm>
+            <a:off x="914400" y="4855464"/>
+            <a:ext cx="2286000" cy="274320"/>
+          </a:xfrm>
+          <a:prstGeom prst="rect">
+            <a:avLst/>
+          </a:prstGeom>
+          <a:noFill/>
+        </p:spPr>
+        <p:txBody>
+          <a:bodyPr wrap="square" anchor="t">
+            <a:spAutoFit/>
+          </a:bodyPr>
+          <a:lstStyle/>
+          <a:p>
+            <a:pPr algn="l">
+              <a:lnSpc>
+                <a:spcPct val="106000"/>
+              </a:lnSpc>
+              <a:spcAft>
+                <a:spcPts val="400"/>
+              </a:spcAft>
+            </a:pPr>
+            <a:r>
+              <a:rPr sz="1200" b="1">
+                <a:solidFill>
+                  <a:srgbClr val="E9EFFA"/>
+                </a:solidFill>
+                <a:latin typeface="Leelawadee UI"/>
+              </a:rPr>
+              <a:t>Admin &amp; Setup</a:t>
+            </a:r>
+          </a:p>
+        </p:txBody>
+      </p:sp>
+      <p:sp>
+        <p:nvSpPr>
+          <p:cNvPr id="31" name="TextBox 30"/>
+          <p:cNvSpPr txBox="1"/>
+          <p:nvPr/>
+        </p:nvSpPr>
+        <p:spPr>
+          <a:xfrm>
+            <a:off x="914400" y="5129784"/>
+            <a:ext cx="4800600" cy="274320"/>
+          </a:xfrm>
+          <a:prstGeom prst="rect">
+            <a:avLst/>
+          </a:prstGeom>
+          <a:noFill/>
+        </p:spPr>
+        <p:txBody>
+          <a:bodyPr wrap="square" anchor="t">
+            <a:spAutoFit/>
+          </a:bodyPr>
+          <a:lstStyle/>
+          <a:p>
+            <a:pPr algn="l">
+              <a:lnSpc>
+                <a:spcPct val="106000"/>
+              </a:lnSpc>
+              <a:spcAft>
+                <a:spcPts val="400"/>
+              </a:spcAft>
+            </a:pPr>
+            <a:r>
+              <a:rPr sz="1000" b="0">
+                <a:solidFill>
+                  <a:srgbClr val="9FB0CB"/>
+                </a:solidFill>
+                <a:latin typeface="Leelawadee UI"/>
+              </a:rPr>
+              <a:t>schema + รีโหลดข้อมูล idempotent + ดาวน์โหลด CSV</a:t>
+            </a:r>
+          </a:p>
+        </p:txBody>
+      </p:sp>
       <p:pic>
         <p:nvPicPr>
-          <p:cNvPr id="8" name="Picture 7" descr="app_reco.png"/>
+          <p:cNvPr id="32" name="Picture 31" descr="app_reco.png"/>
           <p:cNvPicPr>
             <a:picLocks noChangeAspect="1"/>
           </p:cNvPicPr>
@@ -22051,8 +23214,8 @@
         </p:blipFill>
         <p:spPr>
           <a:xfrm>
-            <a:off x="2991863" y="1143000"/>
-            <a:ext cx="6214368" cy="5120640"/>
+            <a:off x="6080760" y="1764252"/>
+            <a:ext cx="5367528" cy="3832414"/>
           </a:xfrm>
           <a:prstGeom prst="rect">
             <a:avLst/>

--- a/slides/นำเสนอระบบแนะนำมือถือ_007.pptx
+++ b/slides/นำเสนอระบบแนะนำมือถือ_007.pptx
@@ -22035,7 +22035,7 @@
                 </a:solidFill>
                 <a:latin typeface="Leelawadee UI"/>
               </a:rPr>
-              <a:t>เว็บแอป Streamlit ต่อ Neo4j — เมนู 6 หน้า</a:t>
+              <a:t>เว็บแอป Streamlit ต่อ Neo4j — เมนู 6 หน้า + หน้ารวมงาน</a:t>
             </a:r>
           </a:p>
         </p:txBody>
@@ -22174,8 +22174,8 @@
         </p:nvSpPr>
         <p:spPr>
           <a:xfrm>
-            <a:off x="749808" y="1188720"/>
-            <a:ext cx="5120640" cy="658368"/>
+            <a:off x="749808" y="1152144"/>
+            <a:ext cx="5120640" cy="603504"/>
           </a:xfrm>
           <a:prstGeom prst="roundRect">
             <a:avLst>
@@ -22220,8 +22220,8 @@
         </p:nvSpPr>
         <p:spPr>
           <a:xfrm>
-            <a:off x="749808" y="1188720"/>
-            <a:ext cx="50292" cy="658368"/>
+            <a:off x="749808" y="1152144"/>
+            <a:ext cx="50292" cy="603504"/>
           </a:xfrm>
           <a:prstGeom prst="rect">
             <a:avLst/>
@@ -22262,30 +22262,30 @@
         </p:nvSpPr>
         <p:spPr>
           <a:xfrm>
-            <a:off x="914400" y="1243584"/>
-            <a:ext cx="2286000" cy="274320"/>
-          </a:xfrm>
-          <a:prstGeom prst="rect">
-            <a:avLst/>
-          </a:prstGeom>
-          <a:noFill/>
-        </p:spPr>
-        <p:txBody>
-          <a:bodyPr wrap="square" anchor="t">
-            <a:spAutoFit/>
-          </a:bodyPr>
-          <a:lstStyle/>
-          <a:p>
-            <a:pPr algn="l">
-              <a:lnSpc>
-                <a:spcPct val="106000"/>
-              </a:lnSpc>
-              <a:spcAft>
-                <a:spcPts val="400"/>
-              </a:spcAft>
-            </a:pPr>
-            <a:r>
-              <a:rPr sz="1200" b="1">
+            <a:off x="914400" y="1188720"/>
+            <a:ext cx="2286000" cy="256032"/>
+          </a:xfrm>
+          <a:prstGeom prst="rect">
+            <a:avLst/>
+          </a:prstGeom>
+          <a:noFill/>
+        </p:spPr>
+        <p:txBody>
+          <a:bodyPr wrap="square" anchor="t">
+            <a:spAutoFit/>
+          </a:bodyPr>
+          <a:lstStyle/>
+          <a:p>
+            <a:pPr algn="l">
+              <a:lnSpc>
+                <a:spcPct val="106000"/>
+              </a:lnSpc>
+              <a:spcAft>
+                <a:spcPts val="400"/>
+              </a:spcAft>
+            </a:pPr>
+            <a:r>
+              <a:rPr sz="1150" b="1">
                 <a:solidFill>
                   <a:srgbClr val="E9EFFA"/>
                 </a:solidFill>
@@ -22304,30 +22304,30 @@
         </p:nvSpPr>
         <p:spPr>
           <a:xfrm>
-            <a:off x="914400" y="1517904"/>
-            <a:ext cx="4800600" cy="274320"/>
-          </a:xfrm>
-          <a:prstGeom prst="rect">
-            <a:avLst/>
-          </a:prstGeom>
-          <a:noFill/>
-        </p:spPr>
-        <p:txBody>
-          <a:bodyPr wrap="square" anchor="t">
-            <a:spAutoFit/>
-          </a:bodyPr>
-          <a:lstStyle/>
-          <a:p>
-            <a:pPr algn="l">
-              <a:lnSpc>
-                <a:spcPct val="106000"/>
-              </a:lnSpc>
-              <a:spcAft>
-                <a:spcPts val="400"/>
-              </a:spcAft>
-            </a:pPr>
-            <a:r>
-              <a:rPr sz="1000" b="0">
+            <a:off x="914400" y="1444752"/>
+            <a:ext cx="4800600" cy="256032"/>
+          </a:xfrm>
+          <a:prstGeom prst="rect">
+            <a:avLst/>
+          </a:prstGeom>
+          <a:noFill/>
+        </p:spPr>
+        <p:txBody>
+          <a:bodyPr wrap="square" anchor="t">
+            <a:spAutoFit/>
+          </a:bodyPr>
+          <a:lstStyle/>
+          <a:p>
+            <a:pPr algn="l">
+              <a:lnSpc>
+                <a:spcPct val="106000"/>
+              </a:lnSpc>
+              <a:spcAft>
+                <a:spcPts val="400"/>
+              </a:spcAft>
+            </a:pPr>
+            <a:r>
+              <a:rPr sz="950" b="0">
                 <a:solidFill>
                   <a:srgbClr val="9FB0CB"/>
                 </a:solidFill>
@@ -22346,8 +22346,8 @@
         </p:nvSpPr>
         <p:spPr>
           <a:xfrm>
-            <a:off x="749808" y="1911095"/>
-            <a:ext cx="5120640" cy="658368"/>
+            <a:off x="749808" y="1810512"/>
+            <a:ext cx="5120640" cy="603504"/>
           </a:xfrm>
           <a:prstGeom prst="roundRect">
             <a:avLst>
@@ -22392,8 +22392,8 @@
         </p:nvSpPr>
         <p:spPr>
           <a:xfrm>
-            <a:off x="749808" y="1911095"/>
-            <a:ext cx="50292" cy="658368"/>
+            <a:off x="749808" y="1810512"/>
+            <a:ext cx="50292" cy="603504"/>
           </a:xfrm>
           <a:prstGeom prst="rect">
             <a:avLst/>
@@ -22434,30 +22434,30 @@
         </p:nvSpPr>
         <p:spPr>
           <a:xfrm>
-            <a:off x="914400" y="1965960"/>
-            <a:ext cx="2286000" cy="274320"/>
-          </a:xfrm>
-          <a:prstGeom prst="rect">
-            <a:avLst/>
-          </a:prstGeom>
-          <a:noFill/>
-        </p:spPr>
-        <p:txBody>
-          <a:bodyPr wrap="square" anchor="t">
-            <a:spAutoFit/>
-          </a:bodyPr>
-          <a:lstStyle/>
-          <a:p>
-            <a:pPr algn="l">
-              <a:lnSpc>
-                <a:spcPct val="106000"/>
-              </a:lnSpc>
-              <a:spcAft>
-                <a:spcPts val="400"/>
-              </a:spcAft>
-            </a:pPr>
-            <a:r>
-              <a:rPr sz="1200" b="1">
+            <a:off x="914400" y="1847088"/>
+            <a:ext cx="2286000" cy="256032"/>
+          </a:xfrm>
+          <a:prstGeom prst="rect">
+            <a:avLst/>
+          </a:prstGeom>
+          <a:noFill/>
+        </p:spPr>
+        <p:txBody>
+          <a:bodyPr wrap="square" anchor="t">
+            <a:spAutoFit/>
+          </a:bodyPr>
+          <a:lstStyle/>
+          <a:p>
+            <a:pPr algn="l">
+              <a:lnSpc>
+                <a:spcPct val="106000"/>
+              </a:lnSpc>
+              <a:spcAft>
+                <a:spcPts val="400"/>
+              </a:spcAft>
+            </a:pPr>
+            <a:r>
+              <a:rPr sz="1150" b="1">
                 <a:solidFill>
                   <a:srgbClr val="E9EFFA"/>
                 </a:solidFill>
@@ -22476,30 +22476,30 @@
         </p:nvSpPr>
         <p:spPr>
           <a:xfrm>
-            <a:off x="914400" y="2240279"/>
-            <a:ext cx="4800600" cy="274320"/>
-          </a:xfrm>
-          <a:prstGeom prst="rect">
-            <a:avLst/>
-          </a:prstGeom>
-          <a:noFill/>
-        </p:spPr>
-        <p:txBody>
-          <a:bodyPr wrap="square" anchor="t">
-            <a:spAutoFit/>
-          </a:bodyPr>
-          <a:lstStyle/>
-          <a:p>
-            <a:pPr algn="l">
-              <a:lnSpc>
-                <a:spcPct val="106000"/>
-              </a:lnSpc>
-              <a:spcAft>
-                <a:spcPts val="400"/>
-              </a:spcAft>
-            </a:pPr>
-            <a:r>
-              <a:rPr sz="1000" b="0">
+            <a:off x="914400" y="2103120"/>
+            <a:ext cx="4800600" cy="256032"/>
+          </a:xfrm>
+          <a:prstGeom prst="rect">
+            <a:avLst/>
+          </a:prstGeom>
+          <a:noFill/>
+        </p:spPr>
+        <p:txBody>
+          <a:bodyPr wrap="square" anchor="t">
+            <a:spAutoFit/>
+          </a:bodyPr>
+          <a:lstStyle/>
+          <a:p>
+            <a:pPr algn="l">
+              <a:lnSpc>
+                <a:spcPct val="106000"/>
+              </a:lnSpc>
+              <a:spcAft>
+                <a:spcPts val="400"/>
+              </a:spcAft>
+            </a:pPr>
+            <a:r>
+              <a:rPr sz="950" b="0">
                 <a:solidFill>
                   <a:srgbClr val="9FB0CB"/>
                 </a:solidFill>
@@ -22518,8 +22518,8 @@
         </p:nvSpPr>
         <p:spPr>
           <a:xfrm>
-            <a:off x="749808" y="2633472"/>
-            <a:ext cx="5120640" cy="658368"/>
+            <a:off x="749808" y="2468880"/>
+            <a:ext cx="5120640" cy="603504"/>
           </a:xfrm>
           <a:prstGeom prst="roundRect">
             <a:avLst>
@@ -22564,8 +22564,8 @@
         </p:nvSpPr>
         <p:spPr>
           <a:xfrm>
-            <a:off x="749808" y="2633472"/>
-            <a:ext cx="50292" cy="658368"/>
+            <a:off x="749808" y="2468880"/>
+            <a:ext cx="50292" cy="603504"/>
           </a:xfrm>
           <a:prstGeom prst="rect">
             <a:avLst/>
@@ -22606,30 +22606,30 @@
         </p:nvSpPr>
         <p:spPr>
           <a:xfrm>
-            <a:off x="914400" y="2688336"/>
-            <a:ext cx="2286000" cy="274320"/>
-          </a:xfrm>
-          <a:prstGeom prst="rect">
-            <a:avLst/>
-          </a:prstGeom>
-          <a:noFill/>
-        </p:spPr>
-        <p:txBody>
-          <a:bodyPr wrap="square" anchor="t">
-            <a:spAutoFit/>
-          </a:bodyPr>
-          <a:lstStyle/>
-          <a:p>
-            <a:pPr algn="l">
-              <a:lnSpc>
-                <a:spcPct val="106000"/>
-              </a:lnSpc>
-              <a:spcAft>
-                <a:spcPts val="400"/>
-              </a:spcAft>
-            </a:pPr>
-            <a:r>
-              <a:rPr sz="1200" b="1">
+            <a:off x="914400" y="2505456"/>
+            <a:ext cx="2286000" cy="256032"/>
+          </a:xfrm>
+          <a:prstGeom prst="rect">
+            <a:avLst/>
+          </a:prstGeom>
+          <a:noFill/>
+        </p:spPr>
+        <p:txBody>
+          <a:bodyPr wrap="square" anchor="t">
+            <a:spAutoFit/>
+          </a:bodyPr>
+          <a:lstStyle/>
+          <a:p>
+            <a:pPr algn="l">
+              <a:lnSpc>
+                <a:spcPct val="106000"/>
+              </a:lnSpc>
+              <a:spcAft>
+                <a:spcPts val="400"/>
+              </a:spcAft>
+            </a:pPr>
+            <a:r>
+              <a:rPr sz="1150" b="1">
                 <a:solidFill>
                   <a:srgbClr val="E9EFFA"/>
                 </a:solidFill>
@@ -22648,30 +22648,30 @@
         </p:nvSpPr>
         <p:spPr>
           <a:xfrm>
-            <a:off x="914400" y="2962656"/>
-            <a:ext cx="4800600" cy="274320"/>
-          </a:xfrm>
-          <a:prstGeom prst="rect">
-            <a:avLst/>
-          </a:prstGeom>
-          <a:noFill/>
-        </p:spPr>
-        <p:txBody>
-          <a:bodyPr wrap="square" anchor="t">
-            <a:spAutoFit/>
-          </a:bodyPr>
-          <a:lstStyle/>
-          <a:p>
-            <a:pPr algn="l">
-              <a:lnSpc>
-                <a:spcPct val="106000"/>
-              </a:lnSpc>
-              <a:spcAft>
-                <a:spcPts val="400"/>
-              </a:spcAft>
-            </a:pPr>
-            <a:r>
-              <a:rPr sz="1000" b="0">
+            <a:off x="914400" y="2761488"/>
+            <a:ext cx="4800600" cy="256032"/>
+          </a:xfrm>
+          <a:prstGeom prst="rect">
+            <a:avLst/>
+          </a:prstGeom>
+          <a:noFill/>
+        </p:spPr>
+        <p:txBody>
+          <a:bodyPr wrap="square" anchor="t">
+            <a:spAutoFit/>
+          </a:bodyPr>
+          <a:lstStyle/>
+          <a:p>
+            <a:pPr algn="l">
+              <a:lnSpc>
+                <a:spcPct val="106000"/>
+              </a:lnSpc>
+              <a:spcAft>
+                <a:spcPts val="400"/>
+              </a:spcAft>
+            </a:pPr>
+            <a:r>
+              <a:rPr sz="950" b="0">
                 <a:solidFill>
                   <a:srgbClr val="9FB0CB"/>
                 </a:solidFill>
@@ -22690,8 +22690,8 @@
         </p:nvSpPr>
         <p:spPr>
           <a:xfrm>
-            <a:off x="749808" y="3355848"/>
-            <a:ext cx="5120640" cy="658368"/>
+            <a:off x="749808" y="3127248"/>
+            <a:ext cx="5120640" cy="603504"/>
           </a:xfrm>
           <a:prstGeom prst="roundRect">
             <a:avLst>
@@ -22736,8 +22736,8 @@
         </p:nvSpPr>
         <p:spPr>
           <a:xfrm>
-            <a:off x="749808" y="3355848"/>
-            <a:ext cx="50292" cy="658368"/>
+            <a:off x="749808" y="3127248"/>
+            <a:ext cx="50292" cy="603504"/>
           </a:xfrm>
           <a:prstGeom prst="rect">
             <a:avLst/>
@@ -22778,30 +22778,30 @@
         </p:nvSpPr>
         <p:spPr>
           <a:xfrm>
-            <a:off x="914400" y="3410712"/>
-            <a:ext cx="2286000" cy="274320"/>
-          </a:xfrm>
-          <a:prstGeom prst="rect">
-            <a:avLst/>
-          </a:prstGeom>
-          <a:noFill/>
-        </p:spPr>
-        <p:txBody>
-          <a:bodyPr wrap="square" anchor="t">
-            <a:spAutoFit/>
-          </a:bodyPr>
-          <a:lstStyle/>
-          <a:p>
-            <a:pPr algn="l">
-              <a:lnSpc>
-                <a:spcPct val="106000"/>
-              </a:lnSpc>
-              <a:spcAft>
-                <a:spcPts val="400"/>
-              </a:spcAft>
-            </a:pPr>
-            <a:r>
-              <a:rPr sz="1200" b="1">
+            <a:off x="914400" y="3163824"/>
+            <a:ext cx="2286000" cy="256032"/>
+          </a:xfrm>
+          <a:prstGeom prst="rect">
+            <a:avLst/>
+          </a:prstGeom>
+          <a:noFill/>
+        </p:spPr>
+        <p:txBody>
+          <a:bodyPr wrap="square" anchor="t">
+            <a:spAutoFit/>
+          </a:bodyPr>
+          <a:lstStyle/>
+          <a:p>
+            <a:pPr algn="l">
+              <a:lnSpc>
+                <a:spcPct val="106000"/>
+              </a:lnSpc>
+              <a:spcAft>
+                <a:spcPts val="400"/>
+              </a:spcAft>
+            </a:pPr>
+            <a:r>
+              <a:rPr sz="1150" b="1">
                 <a:solidFill>
                   <a:srgbClr val="E9EFFA"/>
                 </a:solidFill>
@@ -22820,30 +22820,30 @@
         </p:nvSpPr>
         <p:spPr>
           <a:xfrm>
-            <a:off x="914400" y="3685032"/>
-            <a:ext cx="4800600" cy="274320"/>
-          </a:xfrm>
-          <a:prstGeom prst="rect">
-            <a:avLst/>
-          </a:prstGeom>
-          <a:noFill/>
-        </p:spPr>
-        <p:txBody>
-          <a:bodyPr wrap="square" anchor="t">
-            <a:spAutoFit/>
-          </a:bodyPr>
-          <a:lstStyle/>
-          <a:p>
-            <a:pPr algn="l">
-              <a:lnSpc>
-                <a:spcPct val="106000"/>
-              </a:lnSpc>
-              <a:spcAft>
-                <a:spcPts val="400"/>
-              </a:spcAft>
-            </a:pPr>
-            <a:r>
-              <a:rPr sz="1000" b="0">
+            <a:off x="914400" y="3419856"/>
+            <a:ext cx="4800600" cy="256032"/>
+          </a:xfrm>
+          <a:prstGeom prst="rect">
+            <a:avLst/>
+          </a:prstGeom>
+          <a:noFill/>
+        </p:spPr>
+        <p:txBody>
+          <a:bodyPr wrap="square" anchor="t">
+            <a:spAutoFit/>
+          </a:bodyPr>
+          <a:lstStyle/>
+          <a:p>
+            <a:pPr algn="l">
+              <a:lnSpc>
+                <a:spcPct val="106000"/>
+              </a:lnSpc>
+              <a:spcAft>
+                <a:spcPts val="400"/>
+              </a:spcAft>
+            </a:pPr>
+            <a:r>
+              <a:rPr sz="950" b="0">
                 <a:solidFill>
                   <a:srgbClr val="9FB0CB"/>
                 </a:solidFill>
@@ -22862,8 +22862,8 @@
         </p:nvSpPr>
         <p:spPr>
           <a:xfrm>
-            <a:off x="749808" y="4078224"/>
-            <a:ext cx="5120640" cy="658368"/>
+            <a:off x="749808" y="3785615"/>
+            <a:ext cx="5120640" cy="603504"/>
           </a:xfrm>
           <a:prstGeom prst="roundRect">
             <a:avLst>
@@ -22908,8 +22908,8 @@
         </p:nvSpPr>
         <p:spPr>
           <a:xfrm>
-            <a:off x="749808" y="4078224"/>
-            <a:ext cx="50292" cy="658368"/>
+            <a:off x="749808" y="3785615"/>
+            <a:ext cx="50292" cy="603504"/>
           </a:xfrm>
           <a:prstGeom prst="rect">
             <a:avLst/>
@@ -22950,30 +22950,30 @@
         </p:nvSpPr>
         <p:spPr>
           <a:xfrm>
-            <a:off x="914400" y="4133087"/>
-            <a:ext cx="2286000" cy="274320"/>
-          </a:xfrm>
-          <a:prstGeom prst="rect">
-            <a:avLst/>
-          </a:prstGeom>
-          <a:noFill/>
-        </p:spPr>
-        <p:txBody>
-          <a:bodyPr wrap="square" anchor="t">
-            <a:spAutoFit/>
-          </a:bodyPr>
-          <a:lstStyle/>
-          <a:p>
-            <a:pPr algn="l">
-              <a:lnSpc>
-                <a:spcPct val="106000"/>
-              </a:lnSpc>
-              <a:spcAft>
-                <a:spcPts val="400"/>
-              </a:spcAft>
-            </a:pPr>
-            <a:r>
-              <a:rPr sz="1200" b="1">
+            <a:off x="914400" y="3822191"/>
+            <a:ext cx="2286000" cy="256032"/>
+          </a:xfrm>
+          <a:prstGeom prst="rect">
+            <a:avLst/>
+          </a:prstGeom>
+          <a:noFill/>
+        </p:spPr>
+        <p:txBody>
+          <a:bodyPr wrap="square" anchor="t">
+            <a:spAutoFit/>
+          </a:bodyPr>
+          <a:lstStyle/>
+          <a:p>
+            <a:pPr algn="l">
+              <a:lnSpc>
+                <a:spcPct val="106000"/>
+              </a:lnSpc>
+              <a:spcAft>
+                <a:spcPts val="400"/>
+              </a:spcAft>
+            </a:pPr>
+            <a:r>
+              <a:rPr sz="1150" b="1">
                 <a:solidFill>
                   <a:srgbClr val="E9EFFA"/>
                 </a:solidFill>
@@ -22992,30 +22992,30 @@
         </p:nvSpPr>
         <p:spPr>
           <a:xfrm>
-            <a:off x="914400" y="4407408"/>
-            <a:ext cx="4800600" cy="274320"/>
-          </a:xfrm>
-          <a:prstGeom prst="rect">
-            <a:avLst/>
-          </a:prstGeom>
-          <a:noFill/>
-        </p:spPr>
-        <p:txBody>
-          <a:bodyPr wrap="square" anchor="t">
-            <a:spAutoFit/>
-          </a:bodyPr>
-          <a:lstStyle/>
-          <a:p>
-            <a:pPr algn="l">
-              <a:lnSpc>
-                <a:spcPct val="106000"/>
-              </a:lnSpc>
-              <a:spcAft>
-                <a:spcPts val="400"/>
-              </a:spcAft>
-            </a:pPr>
-            <a:r>
-              <a:rPr sz="1000" b="0">
+            <a:off x="914400" y="4078224"/>
+            <a:ext cx="4800600" cy="256032"/>
+          </a:xfrm>
+          <a:prstGeom prst="rect">
+            <a:avLst/>
+          </a:prstGeom>
+          <a:noFill/>
+        </p:spPr>
+        <p:txBody>
+          <a:bodyPr wrap="square" anchor="t">
+            <a:spAutoFit/>
+          </a:bodyPr>
+          <a:lstStyle/>
+          <a:p>
+            <a:pPr algn="l">
+              <a:lnSpc>
+                <a:spcPct val="106000"/>
+              </a:lnSpc>
+              <a:spcAft>
+                <a:spcPts val="400"/>
+              </a:spcAft>
+            </a:pPr>
+            <a:r>
+              <a:rPr sz="950" b="0">
                 <a:solidFill>
                   <a:srgbClr val="9FB0CB"/>
                 </a:solidFill>
@@ -23034,8 +23034,8 @@
         </p:nvSpPr>
         <p:spPr>
           <a:xfrm>
-            <a:off x="749808" y="4800600"/>
-            <a:ext cx="5120640" cy="658368"/>
+            <a:off x="749808" y="4443983"/>
+            <a:ext cx="5120640" cy="603504"/>
           </a:xfrm>
           <a:prstGeom prst="roundRect">
             <a:avLst>
@@ -23080,8 +23080,8 @@
         </p:nvSpPr>
         <p:spPr>
           <a:xfrm>
-            <a:off x="749808" y="4800600"/>
-            <a:ext cx="50292" cy="658368"/>
+            <a:off x="749808" y="4443983"/>
+            <a:ext cx="50292" cy="603504"/>
           </a:xfrm>
           <a:prstGeom prst="rect">
             <a:avLst/>
@@ -23122,30 +23122,30 @@
         </p:nvSpPr>
         <p:spPr>
           <a:xfrm>
-            <a:off x="914400" y="4855464"/>
-            <a:ext cx="2286000" cy="274320"/>
-          </a:xfrm>
-          <a:prstGeom prst="rect">
-            <a:avLst/>
-          </a:prstGeom>
-          <a:noFill/>
-        </p:spPr>
-        <p:txBody>
-          <a:bodyPr wrap="square" anchor="t">
-            <a:spAutoFit/>
-          </a:bodyPr>
-          <a:lstStyle/>
-          <a:p>
-            <a:pPr algn="l">
-              <a:lnSpc>
-                <a:spcPct val="106000"/>
-              </a:lnSpc>
-              <a:spcAft>
-                <a:spcPts val="400"/>
-              </a:spcAft>
-            </a:pPr>
-            <a:r>
-              <a:rPr sz="1200" b="1">
+            <a:off x="914400" y="4480559"/>
+            <a:ext cx="2286000" cy="256032"/>
+          </a:xfrm>
+          <a:prstGeom prst="rect">
+            <a:avLst/>
+          </a:prstGeom>
+          <a:noFill/>
+        </p:spPr>
+        <p:txBody>
+          <a:bodyPr wrap="square" anchor="t">
+            <a:spAutoFit/>
+          </a:bodyPr>
+          <a:lstStyle/>
+          <a:p>
+            <a:pPr algn="l">
+              <a:lnSpc>
+                <a:spcPct val="106000"/>
+              </a:lnSpc>
+              <a:spcAft>
+                <a:spcPts val="400"/>
+              </a:spcAft>
+            </a:pPr>
+            <a:r>
+              <a:rPr sz="1150" b="1">
                 <a:solidFill>
                   <a:srgbClr val="E9EFFA"/>
                 </a:solidFill>
@@ -23164,43 +23164,215 @@
         </p:nvSpPr>
         <p:spPr>
           <a:xfrm>
-            <a:off x="914400" y="5129784"/>
-            <a:ext cx="4800600" cy="274320"/>
-          </a:xfrm>
-          <a:prstGeom prst="rect">
-            <a:avLst/>
-          </a:prstGeom>
-          <a:noFill/>
-        </p:spPr>
-        <p:txBody>
-          <a:bodyPr wrap="square" anchor="t">
-            <a:spAutoFit/>
-          </a:bodyPr>
-          <a:lstStyle/>
-          <a:p>
-            <a:pPr algn="l">
-              <a:lnSpc>
-                <a:spcPct val="106000"/>
-              </a:lnSpc>
-              <a:spcAft>
-                <a:spcPts val="400"/>
-              </a:spcAft>
-            </a:pPr>
-            <a:r>
-              <a:rPr sz="1000" b="0">
+            <a:off x="914400" y="4736592"/>
+            <a:ext cx="4800600" cy="256032"/>
+          </a:xfrm>
+          <a:prstGeom prst="rect">
+            <a:avLst/>
+          </a:prstGeom>
+          <a:noFill/>
+        </p:spPr>
+        <p:txBody>
+          <a:bodyPr wrap="square" anchor="t">
+            <a:spAutoFit/>
+          </a:bodyPr>
+          <a:lstStyle/>
+          <a:p>
+            <a:pPr algn="l">
+              <a:lnSpc>
+                <a:spcPct val="106000"/>
+              </a:lnSpc>
+              <a:spcAft>
+                <a:spcPts val="400"/>
+              </a:spcAft>
+            </a:pPr>
+            <a:r>
+              <a:rPr sz="950" b="0">
                 <a:solidFill>
                   <a:srgbClr val="9FB0CB"/>
                 </a:solidFill>
                 <a:latin typeface="Leelawadee UI"/>
               </a:rPr>
               <a:t>schema + รีโหลดข้อมูล idempotent + ดาวน์โหลด CSV</a:t>
+            </a:r>
+          </a:p>
+        </p:txBody>
+      </p:sp>
+      <p:sp>
+        <p:nvSpPr>
+          <p:cNvPr id="32" name="Rounded Rectangle 31"/>
+          <p:cNvSpPr/>
+          <p:nvPr/>
+        </p:nvSpPr>
+        <p:spPr>
+          <a:xfrm>
+            <a:off x="749808" y="5102351"/>
+            <a:ext cx="5120640" cy="603504"/>
+          </a:xfrm>
+          <a:prstGeom prst="roundRect">
+            <a:avLst>
+              <a:gd name="adj" fmla="val 6000"/>
+            </a:avLst>
+          </a:prstGeom>
+          <a:solidFill>
+            <a:srgbClr val="172136"/>
+          </a:solidFill>
+          <a:ln w="12700">
+            <a:solidFill>
+              <a:srgbClr val="2B3A5C"/>
+            </a:solidFill>
+          </a:ln>
+          <a:effectLst/>
+        </p:spPr>
+        <p:style>
+          <a:lnRef idx="1">
+            <a:schemeClr val="accent1"/>
+          </a:lnRef>
+          <a:fillRef idx="3">
+            <a:schemeClr val="accent1"/>
+          </a:fillRef>
+          <a:effectRef idx="2">
+            <a:schemeClr val="accent1"/>
+          </a:effectRef>
+          <a:fontRef idx="minor">
+            <a:schemeClr val="lt1"/>
+          </a:fontRef>
+        </p:style>
+        <p:txBody>
+          <a:bodyPr rtlCol="0" anchor="ctr"/>
+          <a:lstStyle/>
+          <a:p/>
+        </p:txBody>
+      </p:sp>
+      <p:sp>
+        <p:nvSpPr>
+          <p:cNvPr id="33" name="Rectangle 32"/>
+          <p:cNvSpPr/>
+          <p:nvPr/>
+        </p:nvSpPr>
+        <p:spPr>
+          <a:xfrm>
+            <a:off x="749808" y="5102351"/>
+            <a:ext cx="50292" cy="603504"/>
+          </a:xfrm>
+          <a:prstGeom prst="rect">
+            <a:avLst/>
+          </a:prstGeom>
+          <a:solidFill>
+            <a:srgbClr val="38BDF8"/>
+          </a:solidFill>
+          <a:ln>
+            <a:noFill/>
+          </a:ln>
+          <a:effectLst/>
+        </p:spPr>
+        <p:style>
+          <a:lnRef idx="1">
+            <a:schemeClr val="accent1"/>
+          </a:lnRef>
+          <a:fillRef idx="3">
+            <a:schemeClr val="accent1"/>
+          </a:fillRef>
+          <a:effectRef idx="2">
+            <a:schemeClr val="accent1"/>
+          </a:effectRef>
+          <a:fontRef idx="minor">
+            <a:schemeClr val="lt1"/>
+          </a:fontRef>
+        </p:style>
+        <p:txBody>
+          <a:bodyPr rtlCol="0" anchor="ctr"/>
+          <a:lstStyle/>
+          <a:p/>
+        </p:txBody>
+      </p:sp>
+      <p:sp>
+        <p:nvSpPr>
+          <p:cNvPr id="34" name="TextBox 33"/>
+          <p:cNvSpPr txBox="1"/>
+          <p:nvPr/>
+        </p:nvSpPr>
+        <p:spPr>
+          <a:xfrm>
+            <a:off x="914400" y="5138927"/>
+            <a:ext cx="2286000" cy="256032"/>
+          </a:xfrm>
+          <a:prstGeom prst="rect">
+            <a:avLst/>
+          </a:prstGeom>
+          <a:noFill/>
+        </p:spPr>
+        <p:txBody>
+          <a:bodyPr wrap="square" anchor="t">
+            <a:spAutoFit/>
+          </a:bodyPr>
+          <a:lstStyle/>
+          <a:p>
+            <a:pPr algn="l">
+              <a:lnSpc>
+                <a:spcPct val="106000"/>
+              </a:lnSpc>
+              <a:spcAft>
+                <a:spcPts val="400"/>
+              </a:spcAft>
+            </a:pPr>
+            <a:r>
+              <a:rPr sz="1150" b="1">
+                <a:solidFill>
+                  <a:srgbClr val="E9EFFA"/>
+                </a:solidFill>
+                <a:latin typeface="Leelawadee UI"/>
+              </a:rPr>
+              <a:t>Index &amp; Links</a:t>
+            </a:r>
+          </a:p>
+        </p:txBody>
+      </p:sp>
+      <p:sp>
+        <p:nvSpPr>
+          <p:cNvPr id="35" name="TextBox 34"/>
+          <p:cNvSpPr txBox="1"/>
+          <p:nvPr/>
+        </p:nvSpPr>
+        <p:spPr>
+          <a:xfrm>
+            <a:off x="914400" y="5394959"/>
+            <a:ext cx="4800600" cy="256032"/>
+          </a:xfrm>
+          <a:prstGeom prst="rect">
+            <a:avLst/>
+          </a:prstGeom>
+          <a:noFill/>
+        </p:spPr>
+        <p:txBody>
+          <a:bodyPr wrap="square" anchor="t">
+            <a:spAutoFit/>
+          </a:bodyPr>
+          <a:lstStyle/>
+          <a:p>
+            <a:pPr algn="l">
+              <a:lnSpc>
+                <a:spcPct val="106000"/>
+              </a:lnSpc>
+              <a:spcAft>
+                <a:spcPts val="400"/>
+              </a:spcAft>
+            </a:pPr>
+            <a:r>
+              <a:rPr sz="950" b="0">
+                <a:solidFill>
+                  <a:srgbClr val="9FB0CB"/>
+                </a:solidFill>
+                <a:latin typeface="Leelawadee UI"/>
+              </a:rPr>
+              <a:t>หัวข้อรวมงานทุกชิ้นบน GitHub + ลิงก์หน้า index</a:t>
             </a:r>
           </a:p>
         </p:txBody>
       </p:sp>
       <p:pic>
         <p:nvPicPr>
-          <p:cNvPr id="32" name="Picture 31" descr="app_reco.png"/>
+          <p:cNvPr id="36" name="Picture 35" descr="app_reco.png"/>
           <p:cNvPicPr>
             <a:picLocks noChangeAspect="1"/>
           </p:cNvPicPr>

--- a/slides/นำเสนอระบบแนะนำมือถือ_007.pptx
+++ b/slides/นำเสนอระบบแนะนำมือถือ_007.pptx
@@ -3916,7 +3916,7 @@
                 </a:solidFill>
                 <a:latin typeface="Leelawadee UI"/>
               </a:rPr>
-              <a:t>สาธิตการใช้งาน: เว็บแอป Streamlit 6 หน้า (Dashboard → Admin) · ข้อมูลบน Neo4j · โค้ด/สไลด์/โน๊ตบุ๊กอยู่บน GitHub</a:t>
+              <a:t>สาธิตการใช้งาน: เว็บแอป Streamlit 8 หน้า (หน้าหลัก → Admin) · ข้อมูลบน Neo4j จริง · โค้ด/สไลด์/โน๊ตบุ๊กอยู่บน GitHub</a:t>
             </a:r>
           </a:p>
         </p:txBody>
@@ -22035,7 +22035,7 @@
                 </a:solidFill>
                 <a:latin typeface="Leelawadee UI"/>
               </a:rPr>
-              <a:t>เว็บแอป Streamlit ต่อ Neo4j — เมนู 6 หน้า + หน้ารวมงาน</a:t>
+              <a:t>เว็บแอป Streamlit ต่อ Neo4j — เมนู 8 หน้า (หน้าหลัก + 7 ส่วน)</a:t>
             </a:r>
           </a:p>
         </p:txBody>
@@ -22227,7 +22227,7 @@
             <a:avLst/>
           </a:prstGeom>
           <a:solidFill>
-            <a:srgbClr val="FF8833"/>
+            <a:srgbClr val="38BDF8"/>
           </a:solidFill>
           <a:ln>
             <a:noFill/>
@@ -22291,7 +22291,7 @@
                 </a:solidFill>
                 <a:latin typeface="Leelawadee UI"/>
               </a:rPr>
-              <a:t>Dashboard</a:t>
+              <a:t>Home · หน้าหลัก</a:t>
             </a:r>
           </a:p>
         </p:txBody>
@@ -22333,7 +22333,7 @@
                 </a:solidFill>
                 <a:latin typeface="Leelawadee UI"/>
               </a:rPr>
-              <a:t>ภาพรวมระบบ 6 ตัวชี้วัด + กราฟ + โปรไฟล์ผู้ใช้</a:t>
+              <a:t>การ์ดทางเข้าแบบ hub + ตัวชี้วัดจริง กดแล้วเข้าหน้านั้น</a:t>
             </a:r>
           </a:p>
         </p:txBody>
@@ -22399,7 +22399,7 @@
             <a:avLst/>
           </a:prstGeom>
           <a:solidFill>
-            <a:srgbClr val="34D399"/>
+            <a:srgbClr val="FF8833"/>
           </a:solidFill>
           <a:ln>
             <a:noFill/>
@@ -22463,7 +22463,7 @@
                 </a:solidFill>
                 <a:latin typeface="Leelawadee UI"/>
               </a:rPr>
-              <a:t>Recommendations</a:t>
+              <a:t>Dashboard</a:t>
             </a:r>
           </a:p>
         </p:txBody>
@@ -22505,7 +22505,7 @@
                 </a:solidFill>
                 <a:latin typeface="Leelawadee UI"/>
               </a:rPr>
-              <a:t>การ์ดคำแนะนำมีภาพสินค้า + คะแนน + เหตุผล (5 วิธี)</a:t>
+              <a:t>ภาพรวมระบบ 6 ตัวชี้วัด + กราฟ + โปรไฟล์ผู้ใช้</a:t>
             </a:r>
           </a:p>
         </p:txBody>
@@ -22571,7 +22571,7 @@
             <a:avLst/>
           </a:prstGeom>
           <a:solidFill>
-            <a:srgbClr val="38BDF8"/>
+            <a:srgbClr val="34D399"/>
           </a:solidFill>
           <a:ln>
             <a:noFill/>
@@ -22635,7 +22635,7 @@
                 </a:solidFill>
                 <a:latin typeface="Leelawadee UI"/>
               </a:rPr>
-              <a:t>Phone Search</a:t>
+              <a:t>Recommendations</a:t>
             </a:r>
           </a:p>
         </p:txBody>
@@ -22677,7 +22677,7 @@
                 </a:solidFill>
                 <a:latin typeface="Leelawadee UI"/>
               </a:rPr>
-              <a:t>ค้นหา/กรอง 23 รุ่น พร้อมภาพสินค้าจริง</a:t>
+              <a:t>การ์ดคำแนะนำมีภาพสินค้า + คะแนน + เหตุผล (5 วิธี)</a:t>
             </a:r>
           </a:p>
         </p:txBody>
@@ -22743,7 +22743,7 @@
             <a:avLst/>
           </a:prstGeom>
           <a:solidFill>
-            <a:srgbClr val="FBBF24"/>
+            <a:srgbClr val="38BDF8"/>
           </a:solidFill>
           <a:ln>
             <a:noFill/>
@@ -22807,7 +22807,7 @@
                 </a:solidFill>
                 <a:latin typeface="Leelawadee UI"/>
               </a:rPr>
-              <a:t>Like &amp; Rate</a:t>
+              <a:t>Phone Search</a:t>
             </a:r>
           </a:p>
         </p:txBody>
@@ -22849,7 +22849,7 @@
                 </a:solidFill>
                 <a:latin typeface="Leelawadee UI"/>
               </a:rPr>
-              <a:t>เพิ่ม/ลบความสนใจ + ให้ดาว แล้วเห็นผลก่อน–หลัง</a:t>
+              <a:t>ค้นหา/กรอง 23 รุ่น พร้อมภาพสินค้าจริง</a:t>
             </a:r>
           </a:p>
         </p:txBody>
@@ -22915,7 +22915,7 @@
             <a:avLst/>
           </a:prstGeom>
           <a:solidFill>
-            <a:srgbClr val="FF8833"/>
+            <a:srgbClr val="FBBF24"/>
           </a:solidFill>
           <a:ln>
             <a:noFill/>
@@ -22979,7 +22979,7 @@
                 </a:solidFill>
                 <a:latin typeface="Leelawadee UI"/>
               </a:rPr>
-              <a:t>Graph Explorer</a:t>
+              <a:t>Like &amp; Rate</a:t>
             </a:r>
           </a:p>
         </p:txBody>
@@ -23021,7 +23021,7 @@
                 </a:solidFill>
                 <a:latin typeface="Leelawadee UI"/>
               </a:rPr>
-              <a:t>กราฟความสัมพันธ์ + ตาราง edge + รัน Cypher เอง</a:t>
+              <a:t>เพิ่ม/ลบความสนใจ + ให้ดาว แล้วเห็นผลก่อน–หลัง</a:t>
             </a:r>
           </a:p>
         </p:txBody>
@@ -23087,7 +23087,7 @@
             <a:avLst/>
           </a:prstGeom>
           <a:solidFill>
-            <a:srgbClr val="34D399"/>
+            <a:srgbClr val="FF8833"/>
           </a:solidFill>
           <a:ln>
             <a:noFill/>
@@ -23151,7 +23151,7 @@
                 </a:solidFill>
                 <a:latin typeface="Leelawadee UI"/>
               </a:rPr>
-              <a:t>Admin &amp; Setup</a:t>
+              <a:t>Graph Explorer</a:t>
             </a:r>
           </a:p>
         </p:txBody>
@@ -23193,7 +23193,7 @@
                 </a:solidFill>
                 <a:latin typeface="Leelawadee UI"/>
               </a:rPr>
-              <a:t>schema + รีโหลดข้อมูล idempotent + ดาวน์โหลด CSV</a:t>
+              <a:t>กราฟความสัมพันธ์ + ตาราง edge + รัน Cypher เอง</a:t>
             </a:r>
           </a:p>
         </p:txBody>
@@ -23259,6 +23259,178 @@
             <a:avLst/>
           </a:prstGeom>
           <a:solidFill>
+            <a:srgbClr val="34D399"/>
+          </a:solidFill>
+          <a:ln>
+            <a:noFill/>
+          </a:ln>
+          <a:effectLst/>
+        </p:spPr>
+        <p:style>
+          <a:lnRef idx="1">
+            <a:schemeClr val="accent1"/>
+          </a:lnRef>
+          <a:fillRef idx="3">
+            <a:schemeClr val="accent1"/>
+          </a:fillRef>
+          <a:effectRef idx="2">
+            <a:schemeClr val="accent1"/>
+          </a:effectRef>
+          <a:fontRef idx="minor">
+            <a:schemeClr val="lt1"/>
+          </a:fontRef>
+        </p:style>
+        <p:txBody>
+          <a:bodyPr rtlCol="0" anchor="ctr"/>
+          <a:lstStyle/>
+          <a:p/>
+        </p:txBody>
+      </p:sp>
+      <p:sp>
+        <p:nvSpPr>
+          <p:cNvPr id="34" name="TextBox 33"/>
+          <p:cNvSpPr txBox="1"/>
+          <p:nvPr/>
+        </p:nvSpPr>
+        <p:spPr>
+          <a:xfrm>
+            <a:off x="914400" y="5138927"/>
+            <a:ext cx="2286000" cy="256032"/>
+          </a:xfrm>
+          <a:prstGeom prst="rect">
+            <a:avLst/>
+          </a:prstGeom>
+          <a:noFill/>
+        </p:spPr>
+        <p:txBody>
+          <a:bodyPr wrap="square" anchor="t">
+            <a:spAutoFit/>
+          </a:bodyPr>
+          <a:lstStyle/>
+          <a:p>
+            <a:pPr algn="l">
+              <a:lnSpc>
+                <a:spcPct val="106000"/>
+              </a:lnSpc>
+              <a:spcAft>
+                <a:spcPts val="400"/>
+              </a:spcAft>
+            </a:pPr>
+            <a:r>
+              <a:rPr sz="1150" b="1">
+                <a:solidFill>
+                  <a:srgbClr val="E9EFFA"/>
+                </a:solidFill>
+                <a:latin typeface="Leelawadee UI"/>
+              </a:rPr>
+              <a:t>Admin &amp; Setup</a:t>
+            </a:r>
+          </a:p>
+        </p:txBody>
+      </p:sp>
+      <p:sp>
+        <p:nvSpPr>
+          <p:cNvPr id="35" name="TextBox 34"/>
+          <p:cNvSpPr txBox="1"/>
+          <p:nvPr/>
+        </p:nvSpPr>
+        <p:spPr>
+          <a:xfrm>
+            <a:off x="914400" y="5394959"/>
+            <a:ext cx="4800600" cy="256032"/>
+          </a:xfrm>
+          <a:prstGeom prst="rect">
+            <a:avLst/>
+          </a:prstGeom>
+          <a:noFill/>
+        </p:spPr>
+        <p:txBody>
+          <a:bodyPr wrap="square" anchor="t">
+            <a:spAutoFit/>
+          </a:bodyPr>
+          <a:lstStyle/>
+          <a:p>
+            <a:pPr algn="l">
+              <a:lnSpc>
+                <a:spcPct val="106000"/>
+              </a:lnSpc>
+              <a:spcAft>
+                <a:spcPts val="400"/>
+              </a:spcAft>
+            </a:pPr>
+            <a:r>
+              <a:rPr sz="950" b="0">
+                <a:solidFill>
+                  <a:srgbClr val="9FB0CB"/>
+                </a:solidFill>
+                <a:latin typeface="Leelawadee UI"/>
+              </a:rPr>
+              <a:t>schema + รีโหลดข้อมูล idempotent + ดาวน์โหลด CSV</a:t>
+            </a:r>
+          </a:p>
+        </p:txBody>
+      </p:sp>
+      <p:sp>
+        <p:nvSpPr>
+          <p:cNvPr id="36" name="Rounded Rectangle 35"/>
+          <p:cNvSpPr/>
+          <p:nvPr/>
+        </p:nvSpPr>
+        <p:spPr>
+          <a:xfrm>
+            <a:off x="749808" y="5760719"/>
+            <a:ext cx="5120640" cy="603504"/>
+          </a:xfrm>
+          <a:prstGeom prst="roundRect">
+            <a:avLst>
+              <a:gd name="adj" fmla="val 6000"/>
+            </a:avLst>
+          </a:prstGeom>
+          <a:solidFill>
+            <a:srgbClr val="172136"/>
+          </a:solidFill>
+          <a:ln w="12700">
+            <a:solidFill>
+              <a:srgbClr val="2B3A5C"/>
+            </a:solidFill>
+          </a:ln>
+          <a:effectLst/>
+        </p:spPr>
+        <p:style>
+          <a:lnRef idx="1">
+            <a:schemeClr val="accent1"/>
+          </a:lnRef>
+          <a:fillRef idx="3">
+            <a:schemeClr val="accent1"/>
+          </a:fillRef>
+          <a:effectRef idx="2">
+            <a:schemeClr val="accent1"/>
+          </a:effectRef>
+          <a:fontRef idx="minor">
+            <a:schemeClr val="lt1"/>
+          </a:fontRef>
+        </p:style>
+        <p:txBody>
+          <a:bodyPr rtlCol="0" anchor="ctr"/>
+          <a:lstStyle/>
+          <a:p/>
+        </p:txBody>
+      </p:sp>
+      <p:sp>
+        <p:nvSpPr>
+          <p:cNvPr id="37" name="Rectangle 36"/>
+          <p:cNvSpPr/>
+          <p:nvPr/>
+        </p:nvSpPr>
+        <p:spPr>
+          <a:xfrm>
+            <a:off x="749808" y="5760719"/>
+            <a:ext cx="50292" cy="603504"/>
+          </a:xfrm>
+          <a:prstGeom prst="rect">
+            <a:avLst/>
+          </a:prstGeom>
+          <a:solidFill>
             <a:srgbClr val="38BDF8"/>
           </a:solidFill>
           <a:ln>
@@ -23288,13 +23460,13 @@
       </p:sp>
       <p:sp>
         <p:nvSpPr>
-          <p:cNvPr id="34" name="TextBox 33"/>
-          <p:cNvSpPr txBox="1"/>
-          <p:nvPr/>
-        </p:nvSpPr>
-        <p:spPr>
-          <a:xfrm>
-            <a:off x="914400" y="5138927"/>
+          <p:cNvPr id="38" name="TextBox 37"/>
+          <p:cNvSpPr txBox="1"/>
+          <p:nvPr/>
+        </p:nvSpPr>
+        <p:spPr>
+          <a:xfrm>
+            <a:off x="914400" y="5797295"/>
             <a:ext cx="2286000" cy="256032"/>
           </a:xfrm>
           <a:prstGeom prst="rect">
@@ -23330,13 +23502,13 @@
       </p:sp>
       <p:sp>
         <p:nvSpPr>
-          <p:cNvPr id="35" name="TextBox 34"/>
-          <p:cNvSpPr txBox="1"/>
-          <p:nvPr/>
-        </p:nvSpPr>
-        <p:spPr>
-          <a:xfrm>
-            <a:off x="914400" y="5394959"/>
+          <p:cNvPr id="39" name="TextBox 38"/>
+          <p:cNvSpPr txBox="1"/>
+          <p:nvPr/>
+        </p:nvSpPr>
+        <p:spPr>
+          <a:xfrm>
+            <a:off x="914400" y="6053327"/>
             <a:ext cx="4800600" cy="256032"/>
           </a:xfrm>
           <a:prstGeom prst="rect">
@@ -23372,7 +23544,7 @@
       </p:sp>
       <p:pic>
         <p:nvPicPr>
-          <p:cNvPr id="36" name="Picture 35" descr="app_reco.png"/>
+          <p:cNvPr id="40" name="Picture 39" descr="app_reco.png"/>
           <p:cNvPicPr>
             <a:picLocks noChangeAspect="1"/>
           </p:cNvPicPr>

--- a/slides/นำเสนอระบบแนะนำมือถือ_007.pptx
+++ b/slides/นำเสนอระบบแนะนำมือถือ_007.pptx
@@ -3916,7 +3916,7 @@
                 </a:solidFill>
                 <a:latin typeface="Leelawadee UI"/>
               </a:rPr>
-              <a:t>สาธิตการใช้งาน: เว็บแอป Streamlit 8 หน้า (หน้าหลัก → Admin) · ข้อมูลบน Neo4j จริง · โค้ด/สไลด์/โน๊ตบุ๊กอยู่บน GitHub</a:t>
+              <a:t>สาธิตการใช้งาน: เว็บแอป Streamlit 7 หน้า (Dashboard → Admin + หน้ารวมงาน) · ข้อมูลบน Neo4j จริง · โค้ด/สไลด์/โน๊ตบุ๊กอยู่บน GitHub</a:t>
             </a:r>
           </a:p>
         </p:txBody>
@@ -22035,7 +22035,7 @@
                 </a:solidFill>
                 <a:latin typeface="Leelawadee UI"/>
               </a:rPr>
-              <a:t>เว็บแอป Streamlit ต่อ Neo4j — เมนู 8 หน้า (หน้าหลัก + 7 ส่วน)</a:t>
+              <a:t>เว็บแอป Streamlit ต่อ Neo4j — เมนู 7 หน้า + หน้ารวมงาน</a:t>
             </a:r>
           </a:p>
         </p:txBody>
@@ -22227,7 +22227,7 @@
             <a:avLst/>
           </a:prstGeom>
           <a:solidFill>
-            <a:srgbClr val="38BDF8"/>
+            <a:srgbClr val="FF8833"/>
           </a:solidFill>
           <a:ln>
             <a:noFill/>
@@ -22291,7 +22291,7 @@
                 </a:solidFill>
                 <a:latin typeface="Leelawadee UI"/>
               </a:rPr>
-              <a:t>Home · หน้าหลัก</a:t>
+              <a:t>Dashboard</a:t>
             </a:r>
           </a:p>
         </p:txBody>
@@ -22333,7 +22333,7 @@
                 </a:solidFill>
                 <a:latin typeface="Leelawadee UI"/>
               </a:rPr>
-              <a:t>การ์ดทางเข้าแบบ hub + ตัวชี้วัดจริง กดแล้วเข้าหน้านั้น</a:t>
+              <a:t>ภาพรวมระบบ 6 ตัวชี้วัด + กราฟ + โปรไฟล์ผู้ใช้</a:t>
             </a:r>
           </a:p>
         </p:txBody>
@@ -22399,7 +22399,7 @@
             <a:avLst/>
           </a:prstGeom>
           <a:solidFill>
-            <a:srgbClr val="FF8833"/>
+            <a:srgbClr val="34D399"/>
           </a:solidFill>
           <a:ln>
             <a:noFill/>
@@ -22463,7 +22463,7 @@
                 </a:solidFill>
                 <a:latin typeface="Leelawadee UI"/>
               </a:rPr>
-              <a:t>Dashboard</a:t>
+              <a:t>Recommendations</a:t>
             </a:r>
           </a:p>
         </p:txBody>
@@ -22505,7 +22505,7 @@
                 </a:solidFill>
                 <a:latin typeface="Leelawadee UI"/>
               </a:rPr>
-              <a:t>ภาพรวมระบบ 6 ตัวชี้วัด + กราฟ + โปรไฟล์ผู้ใช้</a:t>
+              <a:t>การ์ดคำแนะนำมีภาพสินค้า + คะแนน + เหตุผล (5 วิธี)</a:t>
             </a:r>
           </a:p>
         </p:txBody>
@@ -22571,7 +22571,7 @@
             <a:avLst/>
           </a:prstGeom>
           <a:solidFill>
-            <a:srgbClr val="34D399"/>
+            <a:srgbClr val="38BDF8"/>
           </a:solidFill>
           <a:ln>
             <a:noFill/>
@@ -22635,7 +22635,7 @@
                 </a:solidFill>
                 <a:latin typeface="Leelawadee UI"/>
               </a:rPr>
-              <a:t>Recommendations</a:t>
+              <a:t>Phone Search</a:t>
             </a:r>
           </a:p>
         </p:txBody>
@@ -22677,7 +22677,7 @@
                 </a:solidFill>
                 <a:latin typeface="Leelawadee UI"/>
               </a:rPr>
-              <a:t>การ์ดคำแนะนำมีภาพสินค้า + คะแนน + เหตุผล (5 วิธี)</a:t>
+              <a:t>ค้นหา/กรอง 23 รุ่น พร้อมภาพสินค้าจริง</a:t>
             </a:r>
           </a:p>
         </p:txBody>
@@ -22743,7 +22743,7 @@
             <a:avLst/>
           </a:prstGeom>
           <a:solidFill>
-            <a:srgbClr val="38BDF8"/>
+            <a:srgbClr val="FBBF24"/>
           </a:solidFill>
           <a:ln>
             <a:noFill/>
@@ -22807,7 +22807,7 @@
                 </a:solidFill>
                 <a:latin typeface="Leelawadee UI"/>
               </a:rPr>
-              <a:t>Phone Search</a:t>
+              <a:t>Like &amp; Rate</a:t>
             </a:r>
           </a:p>
         </p:txBody>
@@ -22849,7 +22849,7 @@
                 </a:solidFill>
                 <a:latin typeface="Leelawadee UI"/>
               </a:rPr>
-              <a:t>ค้นหา/กรอง 23 รุ่น พร้อมภาพสินค้าจริง</a:t>
+              <a:t>เพิ่ม/ลบความสนใจ + ให้ดาว แล้วเห็นผลก่อน–หลัง</a:t>
             </a:r>
           </a:p>
         </p:txBody>
@@ -22915,7 +22915,7 @@
             <a:avLst/>
           </a:prstGeom>
           <a:solidFill>
-            <a:srgbClr val="FBBF24"/>
+            <a:srgbClr val="FF8833"/>
           </a:solidFill>
           <a:ln>
             <a:noFill/>
@@ -22979,7 +22979,7 @@
                 </a:solidFill>
                 <a:latin typeface="Leelawadee UI"/>
               </a:rPr>
-              <a:t>Like &amp; Rate</a:t>
+              <a:t>Graph Explorer</a:t>
             </a:r>
           </a:p>
         </p:txBody>
@@ -23021,7 +23021,7 @@
                 </a:solidFill>
                 <a:latin typeface="Leelawadee UI"/>
               </a:rPr>
-              <a:t>เพิ่ม/ลบความสนใจ + ให้ดาว แล้วเห็นผลก่อน–หลัง</a:t>
+              <a:t>กราฟความสัมพันธ์ + ตาราง edge + รัน Cypher เอง</a:t>
             </a:r>
           </a:p>
         </p:txBody>
@@ -23087,7 +23087,7 @@
             <a:avLst/>
           </a:prstGeom>
           <a:solidFill>
-            <a:srgbClr val="FF8833"/>
+            <a:srgbClr val="34D399"/>
           </a:solidFill>
           <a:ln>
             <a:noFill/>
@@ -23151,7 +23151,7 @@
                 </a:solidFill>
                 <a:latin typeface="Leelawadee UI"/>
               </a:rPr>
-              <a:t>Graph Explorer</a:t>
+              <a:t>Admin &amp; Setup</a:t>
             </a:r>
           </a:p>
         </p:txBody>
@@ -23193,7 +23193,7 @@
                 </a:solidFill>
                 <a:latin typeface="Leelawadee UI"/>
               </a:rPr>
-              <a:t>กราฟความสัมพันธ์ + ตาราง edge + รัน Cypher เอง</a:t>
+              <a:t>schema + รีโหลดข้อมูล idempotent + ดาวน์โหลด CSV</a:t>
             </a:r>
           </a:p>
         </p:txBody>
@@ -23259,178 +23259,6 @@
             <a:avLst/>
           </a:prstGeom>
           <a:solidFill>
-            <a:srgbClr val="34D399"/>
-          </a:solidFill>
-          <a:ln>
-            <a:noFill/>
-          </a:ln>
-          <a:effectLst/>
-        </p:spPr>
-        <p:style>
-          <a:lnRef idx="1">
-            <a:schemeClr val="accent1"/>
-          </a:lnRef>
-          <a:fillRef idx="3">
-            <a:schemeClr val="accent1"/>
-          </a:fillRef>
-          <a:effectRef idx="2">
-            <a:schemeClr val="accent1"/>
-          </a:effectRef>
-          <a:fontRef idx="minor">
-            <a:schemeClr val="lt1"/>
-          </a:fontRef>
-        </p:style>
-        <p:txBody>
-          <a:bodyPr rtlCol="0" anchor="ctr"/>
-          <a:lstStyle/>
-          <a:p/>
-        </p:txBody>
-      </p:sp>
-      <p:sp>
-        <p:nvSpPr>
-          <p:cNvPr id="34" name="TextBox 33"/>
-          <p:cNvSpPr txBox="1"/>
-          <p:nvPr/>
-        </p:nvSpPr>
-        <p:spPr>
-          <a:xfrm>
-            <a:off x="914400" y="5138927"/>
-            <a:ext cx="2286000" cy="256032"/>
-          </a:xfrm>
-          <a:prstGeom prst="rect">
-            <a:avLst/>
-          </a:prstGeom>
-          <a:noFill/>
-        </p:spPr>
-        <p:txBody>
-          <a:bodyPr wrap="square" anchor="t">
-            <a:spAutoFit/>
-          </a:bodyPr>
-          <a:lstStyle/>
-          <a:p>
-            <a:pPr algn="l">
-              <a:lnSpc>
-                <a:spcPct val="106000"/>
-              </a:lnSpc>
-              <a:spcAft>
-                <a:spcPts val="400"/>
-              </a:spcAft>
-            </a:pPr>
-            <a:r>
-              <a:rPr sz="1150" b="1">
-                <a:solidFill>
-                  <a:srgbClr val="E9EFFA"/>
-                </a:solidFill>
-                <a:latin typeface="Leelawadee UI"/>
-              </a:rPr>
-              <a:t>Admin &amp; Setup</a:t>
-            </a:r>
-          </a:p>
-        </p:txBody>
-      </p:sp>
-      <p:sp>
-        <p:nvSpPr>
-          <p:cNvPr id="35" name="TextBox 34"/>
-          <p:cNvSpPr txBox="1"/>
-          <p:nvPr/>
-        </p:nvSpPr>
-        <p:spPr>
-          <a:xfrm>
-            <a:off x="914400" y="5394959"/>
-            <a:ext cx="4800600" cy="256032"/>
-          </a:xfrm>
-          <a:prstGeom prst="rect">
-            <a:avLst/>
-          </a:prstGeom>
-          <a:noFill/>
-        </p:spPr>
-        <p:txBody>
-          <a:bodyPr wrap="square" anchor="t">
-            <a:spAutoFit/>
-          </a:bodyPr>
-          <a:lstStyle/>
-          <a:p>
-            <a:pPr algn="l">
-              <a:lnSpc>
-                <a:spcPct val="106000"/>
-              </a:lnSpc>
-              <a:spcAft>
-                <a:spcPts val="400"/>
-              </a:spcAft>
-            </a:pPr>
-            <a:r>
-              <a:rPr sz="950" b="0">
-                <a:solidFill>
-                  <a:srgbClr val="9FB0CB"/>
-                </a:solidFill>
-                <a:latin typeface="Leelawadee UI"/>
-              </a:rPr>
-              <a:t>schema + รีโหลดข้อมูล idempotent + ดาวน์โหลด CSV</a:t>
-            </a:r>
-          </a:p>
-        </p:txBody>
-      </p:sp>
-      <p:sp>
-        <p:nvSpPr>
-          <p:cNvPr id="36" name="Rounded Rectangle 35"/>
-          <p:cNvSpPr/>
-          <p:nvPr/>
-        </p:nvSpPr>
-        <p:spPr>
-          <a:xfrm>
-            <a:off x="749808" y="5760719"/>
-            <a:ext cx="5120640" cy="603504"/>
-          </a:xfrm>
-          <a:prstGeom prst="roundRect">
-            <a:avLst>
-              <a:gd name="adj" fmla="val 6000"/>
-            </a:avLst>
-          </a:prstGeom>
-          <a:solidFill>
-            <a:srgbClr val="172136"/>
-          </a:solidFill>
-          <a:ln w="12700">
-            <a:solidFill>
-              <a:srgbClr val="2B3A5C"/>
-            </a:solidFill>
-          </a:ln>
-          <a:effectLst/>
-        </p:spPr>
-        <p:style>
-          <a:lnRef idx="1">
-            <a:schemeClr val="accent1"/>
-          </a:lnRef>
-          <a:fillRef idx="3">
-            <a:schemeClr val="accent1"/>
-          </a:fillRef>
-          <a:effectRef idx="2">
-            <a:schemeClr val="accent1"/>
-          </a:effectRef>
-          <a:fontRef idx="minor">
-            <a:schemeClr val="lt1"/>
-          </a:fontRef>
-        </p:style>
-        <p:txBody>
-          <a:bodyPr rtlCol="0" anchor="ctr"/>
-          <a:lstStyle/>
-          <a:p/>
-        </p:txBody>
-      </p:sp>
-      <p:sp>
-        <p:nvSpPr>
-          <p:cNvPr id="37" name="Rectangle 36"/>
-          <p:cNvSpPr/>
-          <p:nvPr/>
-        </p:nvSpPr>
-        <p:spPr>
-          <a:xfrm>
-            <a:off x="749808" y="5760719"/>
-            <a:ext cx="50292" cy="603504"/>
-          </a:xfrm>
-          <a:prstGeom prst="rect">
-            <a:avLst/>
-          </a:prstGeom>
-          <a:solidFill>
             <a:srgbClr val="38BDF8"/>
           </a:solidFill>
           <a:ln>
@@ -23460,13 +23288,13 @@
       </p:sp>
       <p:sp>
         <p:nvSpPr>
-          <p:cNvPr id="38" name="TextBox 37"/>
-          <p:cNvSpPr txBox="1"/>
-          <p:nvPr/>
-        </p:nvSpPr>
-        <p:spPr>
-          <a:xfrm>
-            <a:off x="914400" y="5797295"/>
+          <p:cNvPr id="34" name="TextBox 33"/>
+          <p:cNvSpPr txBox="1"/>
+          <p:nvPr/>
+        </p:nvSpPr>
+        <p:spPr>
+          <a:xfrm>
+            <a:off x="914400" y="5138927"/>
             <a:ext cx="2286000" cy="256032"/>
           </a:xfrm>
           <a:prstGeom prst="rect">
@@ -23502,13 +23330,13 @@
       </p:sp>
       <p:sp>
         <p:nvSpPr>
-          <p:cNvPr id="39" name="TextBox 38"/>
-          <p:cNvSpPr txBox="1"/>
-          <p:nvPr/>
-        </p:nvSpPr>
-        <p:spPr>
-          <a:xfrm>
-            <a:off x="914400" y="6053327"/>
+          <p:cNvPr id="35" name="TextBox 34"/>
+          <p:cNvSpPr txBox="1"/>
+          <p:nvPr/>
+        </p:nvSpPr>
+        <p:spPr>
+          <a:xfrm>
+            <a:off x="914400" y="5394959"/>
             <a:ext cx="4800600" cy="256032"/>
           </a:xfrm>
           <a:prstGeom prst="rect">
@@ -23544,7 +23372,7 @@
       </p:sp>
       <p:pic>
         <p:nvPicPr>
-          <p:cNvPr id="40" name="Picture 39" descr="app_reco.png"/>
+          <p:cNvPr id="36" name="Picture 35" descr="app_reco.png"/>
           <p:cNvPicPr>
             <a:picLocks noChangeAspect="1"/>
           </p:cNvPicPr>

--- a/slides/นำเสนอระบบแนะนำมือถือ_007.pptx
+++ b/slides/นำเสนอระบบแนะนำมือถือ_007.pptx
@@ -3184,13 +3184,13 @@
               </a:spcAft>
             </a:pPr>
             <a:r>
-              <a:rPr sz="1400" b="1">
+              <a:rPr sz="1300" b="1">
                 <a:solidFill>
                   <a:srgbClr val="38BDF8"/>
                 </a:solidFill>
                 <a:latin typeface="Leelawadee UI"/>
               </a:rPr>
-              <a:t>งาน: พัฒนาระบบแนะนำเป็นระบบของตัวเอง · รหัส 007</a:t>
+              <a:t>งาน: พัฒนาระบบแนะนำเป็นระบบของตัวเอง · นาย ณศักดิ์ ฉายแสงรัตน์ (Nasak) รหัส 664245007 · กลุ่ม 66/43</a:t>
             </a:r>
           </a:p>
         </p:txBody>
@@ -4152,7 +4152,7 @@
                 </a:solidFill>
                 <a:latin typeface="Leelawadee UI"/>
               </a:rPr>
-              <a:t>ระบบแนะนำมือถือ · Neo4j + Streamlit · จัดทำโดย รหัส 007</a:t>
+              <a:t>ระบบแนะนำมือถือ · Neo4j + Streamlit · จัดทำโดย นาย ณศักดิ์ ฉายแสงรัตน์ (Nasak) รหัส 664245007</a:t>
             </a:r>
           </a:p>
         </p:txBody>
@@ -6081,7 +6081,7 @@
                 </a:solidFill>
                 <a:latin typeface="Leelawadee UI"/>
               </a:rPr>
-              <a:t>ระบบแนะนำมือถือ · Neo4j + Streamlit · จัดทำโดย รหัส 007</a:t>
+              <a:t>ระบบแนะนำมือถือ · Neo4j + Streamlit · จัดทำโดย นาย ณศักดิ์ ฉายแสงรัตน์ (Nasak) รหัส 664245007</a:t>
             </a:r>
           </a:p>
         </p:txBody>
@@ -7249,7 +7249,7 @@
                 </a:solidFill>
                 <a:latin typeface="Leelawadee UI"/>
               </a:rPr>
-              <a:t>ระบบแนะนำมือถือ · Neo4j + Streamlit · จัดทำโดย รหัส 007</a:t>
+              <a:t>ระบบแนะนำมือถือ · Neo4j + Streamlit · จัดทำโดย นาย ณศักดิ์ ฉายแสงรัตน์ (Nasak) รหัส 664245007</a:t>
             </a:r>
           </a:p>
         </p:txBody>
@@ -8101,7 +8101,7 @@
                 </a:solidFill>
                 <a:latin typeface="Leelawadee UI"/>
               </a:rPr>
-              <a:t>ระบบแนะนำมือถือ · Neo4j + Streamlit · จัดทำโดย รหัส 007</a:t>
+              <a:t>ระบบแนะนำมือถือ · Neo4j + Streamlit · จัดทำโดย นาย ณศักดิ์ ฉายแสงรัตน์ (Nasak) รหัส 664245007</a:t>
             </a:r>
           </a:p>
         </p:txBody>
@@ -9280,7 +9280,7 @@
                 </a:solidFill>
                 <a:latin typeface="Leelawadee UI"/>
               </a:rPr>
-              <a:t>ระบบแนะนำมือถือ · Neo4j + Streamlit · จัดทำโดย รหัส 007</a:t>
+              <a:t>ระบบแนะนำมือถือ · Neo4j + Streamlit · จัดทำโดย นาย ณศักดิ์ ฉายแสงรัตน์ (Nasak) รหัส 664245007</a:t>
             </a:r>
           </a:p>
         </p:txBody>
@@ -10414,7 +10414,7 @@
                 </a:solidFill>
                 <a:latin typeface="Leelawadee UI"/>
               </a:rPr>
-              <a:t>ระบบแนะนำมือถือ · Neo4j + Streamlit · จัดทำโดย รหัส 007</a:t>
+              <a:t>ระบบแนะนำมือถือ · Neo4j + Streamlit · จัดทำโดย นาย ณศักดิ์ ฉายแสงรัตน์ (Nasak) รหัส 664245007</a:t>
             </a:r>
           </a:p>
         </p:txBody>
@@ -11708,7 +11708,7 @@
                 </a:solidFill>
                 <a:latin typeface="Leelawadee UI"/>
               </a:rPr>
-              <a:t>ระบบแนะนำมือถือ · Neo4j + Streamlit · จัดทำโดย รหัส 007</a:t>
+              <a:t>ระบบแนะนำมือถือ · Neo4j + Streamlit · จัดทำโดย นาย ณศักดิ์ ฉายแสงรัตน์ (Nasak) รหัส 664245007</a:t>
             </a:r>
           </a:p>
         </p:txBody>
@@ -12781,7 +12781,7 @@
                 </a:solidFill>
                 <a:latin typeface="Leelawadee UI"/>
               </a:rPr>
-              <a:t>ระบบแนะนำมือถือ · Neo4j + Streamlit · จัดทำโดย รหัส 007</a:t>
+              <a:t>ระบบแนะนำมือถือ · Neo4j + Streamlit · จัดทำโดย นาย ณศักดิ์ ฉายแสงรัตน์ (Nasak) รหัส 664245007</a:t>
             </a:r>
           </a:p>
         </p:txBody>
@@ -14091,7 +14091,7 @@
                 </a:solidFill>
                 <a:latin typeface="Leelawadee UI"/>
               </a:rPr>
-              <a:t>ระบบแนะนำมือถือ · Neo4j + Streamlit · จัดทำโดย รหัส 007</a:t>
+              <a:t>ระบบแนะนำมือถือ · Neo4j + Streamlit · จัดทำโดย นาย ณศักดิ์ ฉายแสงรัตน์ (Nasak) รหัส 664245007</a:t>
             </a:r>
           </a:p>
         </p:txBody>
@@ -15225,7 +15225,7 @@
                 </a:solidFill>
                 <a:latin typeface="Leelawadee UI"/>
               </a:rPr>
-              <a:t>ระบบแนะนำมือถือ · Neo4j + Streamlit · จัดทำโดย รหัส 007</a:t>
+              <a:t>ระบบแนะนำมือถือ · Neo4j + Streamlit · จัดทำโดย นาย ณศักดิ์ ฉายแสงรัตน์ (Nasak) รหัส 664245007</a:t>
             </a:r>
           </a:p>
         </p:txBody>
@@ -16461,7 +16461,7 @@
                 </a:solidFill>
                 <a:latin typeface="Leelawadee UI"/>
               </a:rPr>
-              <a:t>ระบบแนะนำมือถือ · Neo4j + Streamlit · จัดทำโดย รหัส 007</a:t>
+              <a:t>ระบบแนะนำมือถือ · Neo4j + Streamlit · จัดทำโดย นาย ณศักดิ์ ฉายแสงรัตน์ (Nasak) รหัส 664245007</a:t>
             </a:r>
           </a:p>
         </p:txBody>
@@ -18859,7 +18859,7 @@
                 </a:solidFill>
                 <a:latin typeface="Leelawadee UI"/>
               </a:rPr>
-              <a:t>ระบบแนะนำมือถือ · Neo4j + Streamlit · จัดทำโดย รหัส 007</a:t>
+              <a:t>ระบบแนะนำมือถือ · Neo4j + Streamlit · จัดทำโดย นาย ณศักดิ์ ฉายแสงรัตน์ (Nasak) รหัส 664245007</a:t>
             </a:r>
           </a:p>
         </p:txBody>
@@ -19543,7 +19543,7 @@
                 </a:solidFill>
                 <a:latin typeface="Leelawadee UI"/>
               </a:rPr>
-              <a:t>ระบบแนะนำมือถือ · Neo4j + Streamlit · จัดทำโดย รหัส 007</a:t>
+              <a:t>ระบบแนะนำมือถือ · Neo4j + Streamlit · จัดทำโดย นาย ณศักดิ์ ฉายแสงรัตน์ (Nasak) รหัส 664245007</a:t>
             </a:r>
           </a:p>
         </p:txBody>
@@ -20904,7 +20904,7 @@
                 </a:solidFill>
                 <a:latin typeface="Leelawadee UI"/>
               </a:rPr>
-              <a:t>ระบบแนะนำมือถือ · Neo4j + Streamlit · จัดทำโดย รหัส 007</a:t>
+              <a:t>ระบบแนะนำมือถือ · Neo4j + Streamlit · จัดทำโดย นาย ณศักดิ์ ฉายแสงรัตน์ (Nasak) รหัส 664245007</a:t>
             </a:r>
           </a:p>
         </p:txBody>
@@ -22119,7 +22119,7 @@
                 </a:solidFill>
                 <a:latin typeface="Leelawadee UI"/>
               </a:rPr>
-              <a:t>ระบบแนะนำมือถือ · Neo4j + Streamlit · จัดทำโดย รหัส 007</a:t>
+              <a:t>ระบบแนะนำมือถือ · Neo4j + Streamlit · จัดทำโดย นาย ณศักดิ์ ฉายแสงรัตน์ (Nasak) รหัส 664245007</a:t>
             </a:r>
           </a:p>
         </p:txBody>
